--- a/slides/T319_Regressão_Linear (Parte IV).pptx
+++ b/slides/T319_Regressão_Linear (Parte IV).pptx
@@ -235,7 +235,7 @@
           <a:p>
             <a:fld id="{DAF0AF11-6A8A-4E64-94F5-26D4FBA2A01D}" type="datetimeFigureOut">
               <a:rPr lang="nl-BE" smtClean="0"/>
-              <a:t>8/05/2026</a:t>
+              <a:t>9/10/2026</a:t>
             </a:fld>
             <a:endParaRPr lang="nl-BE"/>
           </a:p>
@@ -6140,7 +6140,7 @@
           <a:p>
             <a:fld id="{C80E15A5-E95B-43EB-9AC7-9A96397448C0}" type="datetimeFigureOut">
               <a:rPr lang="nl-BE" smtClean="0"/>
-              <a:t>8/05/2026</a:t>
+              <a:t>9/10/2026</a:t>
             </a:fld>
             <a:endParaRPr lang="nl-BE"/>
           </a:p>
@@ -6310,7 +6310,7 @@
           <a:p>
             <a:fld id="{C80E15A5-E95B-43EB-9AC7-9A96397448C0}" type="datetimeFigureOut">
               <a:rPr lang="nl-BE" smtClean="0"/>
-              <a:t>8/05/2026</a:t>
+              <a:t>9/10/2026</a:t>
             </a:fld>
             <a:endParaRPr lang="nl-BE"/>
           </a:p>
@@ -6490,7 +6490,7 @@
           <a:p>
             <a:fld id="{C80E15A5-E95B-43EB-9AC7-9A96397448C0}" type="datetimeFigureOut">
               <a:rPr lang="nl-BE" smtClean="0"/>
-              <a:t>8/05/2026</a:t>
+              <a:t>9/10/2026</a:t>
             </a:fld>
             <a:endParaRPr lang="nl-BE"/>
           </a:p>
@@ -6660,7 +6660,7 @@
           <a:p>
             <a:fld id="{C80E15A5-E95B-43EB-9AC7-9A96397448C0}" type="datetimeFigureOut">
               <a:rPr lang="nl-BE" smtClean="0"/>
-              <a:t>8/05/2026</a:t>
+              <a:t>9/10/2026</a:t>
             </a:fld>
             <a:endParaRPr lang="nl-BE"/>
           </a:p>
@@ -6906,7 +6906,7 @@
           <a:p>
             <a:fld id="{C80E15A5-E95B-43EB-9AC7-9A96397448C0}" type="datetimeFigureOut">
               <a:rPr lang="nl-BE" smtClean="0"/>
-              <a:t>8/05/2026</a:t>
+              <a:t>9/10/2026</a:t>
             </a:fld>
             <a:endParaRPr lang="nl-BE"/>
           </a:p>
@@ -7138,7 +7138,7 @@
           <a:p>
             <a:fld id="{C80E15A5-E95B-43EB-9AC7-9A96397448C0}" type="datetimeFigureOut">
               <a:rPr lang="nl-BE" smtClean="0"/>
-              <a:t>8/05/2026</a:t>
+              <a:t>9/10/2026</a:t>
             </a:fld>
             <a:endParaRPr lang="nl-BE"/>
           </a:p>
@@ -7505,7 +7505,7 @@
           <a:p>
             <a:fld id="{C80E15A5-E95B-43EB-9AC7-9A96397448C0}" type="datetimeFigureOut">
               <a:rPr lang="nl-BE" smtClean="0"/>
-              <a:t>8/05/2026</a:t>
+              <a:t>9/10/2026</a:t>
             </a:fld>
             <a:endParaRPr lang="nl-BE"/>
           </a:p>
@@ -7623,7 +7623,7 @@
           <a:p>
             <a:fld id="{C80E15A5-E95B-43EB-9AC7-9A96397448C0}" type="datetimeFigureOut">
               <a:rPr lang="nl-BE" smtClean="0"/>
-              <a:t>8/05/2026</a:t>
+              <a:t>9/10/2026</a:t>
             </a:fld>
             <a:endParaRPr lang="nl-BE"/>
           </a:p>
@@ -7718,7 +7718,7 @@
           <a:p>
             <a:fld id="{C80E15A5-E95B-43EB-9AC7-9A96397448C0}" type="datetimeFigureOut">
               <a:rPr lang="nl-BE" smtClean="0"/>
-              <a:t>8/05/2026</a:t>
+              <a:t>9/10/2026</a:t>
             </a:fld>
             <a:endParaRPr lang="nl-BE"/>
           </a:p>
@@ -7995,7 +7995,7 @@
           <a:p>
             <a:fld id="{C80E15A5-E95B-43EB-9AC7-9A96397448C0}" type="datetimeFigureOut">
               <a:rPr lang="nl-BE" smtClean="0"/>
-              <a:t>8/05/2026</a:t>
+              <a:t>9/10/2026</a:t>
             </a:fld>
             <a:endParaRPr lang="nl-BE"/>
           </a:p>
@@ -8248,7 +8248,7 @@
           <a:p>
             <a:fld id="{C80E15A5-E95B-43EB-9AC7-9A96397448C0}" type="datetimeFigureOut">
               <a:rPr lang="nl-BE" smtClean="0"/>
-              <a:t>8/05/2026</a:t>
+              <a:t>9/10/2026</a:t>
             </a:fld>
             <a:endParaRPr lang="nl-BE"/>
           </a:p>
@@ -8461,7 +8461,7 @@
           <a:p>
             <a:fld id="{C80E15A5-E95B-43EB-9AC7-9A96397448C0}" type="datetimeFigureOut">
               <a:rPr lang="nl-BE" smtClean="0"/>
-              <a:t>8/05/2026</a:t>
+              <a:t>9/10/2026</a:t>
             </a:fld>
             <a:endParaRPr lang="nl-BE"/>
           </a:p>
@@ -9196,14 +9196,11 @@
                 </a:pPr>
                 <a14:m>
                   <m:oMathPara xmlns:m="http://schemas.openxmlformats.org/officeDocument/2006/math">
-                    <m:oMathParaPr>
-                      <m:jc m:val="centerGroup"/>
-                    </m:oMathParaPr>
-                    <m:oMath xmlns:m="http://schemas.openxmlformats.org/officeDocument/2006/math">
+                    <m:oMath>
                       <m:sSub>
                         <m:sSubPr>
                           <m:ctrlPr>
-                            <a:rPr lang="en-US" sz="2600" i="1">
+                            <a:rPr lang="pt-BR" sz="2600" i="1">
                               <a:latin typeface="Cambria Math" panose="02040503050406030204" pitchFamily="18" charset="0"/>
                             </a:rPr>
                           </m:ctrlPr>
@@ -9212,7 +9209,7 @@
                           <m:sSup>
                             <m:sSupPr>
                               <m:ctrlPr>
-                                <a:rPr lang="pt-BR" sz="2600" i="1">
+                                <a:rPr lang="en-US" sz="2600" i="1">
                                   <a:latin typeface="Cambria Math" panose="02040503050406030204" pitchFamily="18" charset="0"/>
                                 </a:rPr>
                               </m:ctrlPr>
@@ -9247,7 +9244,7 @@
                       <m:d>
                         <m:dPr>
                           <m:ctrlPr>
-                            <a:rPr lang="pt-BR" sz="2600" i="1">
+                            <a:rPr lang="pt-BR" sz="2600" b="0" i="1" smtClean="0">
                               <a:latin typeface="Cambria Math" panose="02040503050406030204" pitchFamily="18" charset="0"/>
                             </a:rPr>
                           </m:ctrlPr>
@@ -9304,7 +9301,7 @@
                           <m:d>
                             <m:dPr>
                               <m:ctrlPr>
-                                <a:rPr lang="pt-BR" sz="2600" i="1">
+                                <a:rPr lang="pt-BR" sz="2600" b="0" i="1" smtClean="0">
                                   <a:latin typeface="Cambria Math" panose="02040503050406030204" pitchFamily="18" charset="0"/>
                                 </a:rPr>
                               </m:ctrlPr>
@@ -9329,6 +9326,7 @@
                               <m:ctrlPr>
                                 <a:rPr lang="en-US" sz="2600" i="1">
                                   <a:latin typeface="Cambria Math" panose="02040503050406030204" pitchFamily="18" charset="0"/>
+                                  <a:ea typeface="Cambria Math" panose="02040503050406030204" pitchFamily="18" charset="0"/>
                                 </a:rPr>
                               </m:ctrlPr>
                             </m:sSubPr>
@@ -9345,7 +9343,7 @@
                               <m:sSub>
                                 <m:sSubPr>
                                   <m:ctrlPr>
-                                    <a:rPr lang="en-US" sz="2600" i="1">
+                                    <a:rPr lang="en-US" sz="2600" b="1" i="1">
                                       <a:latin typeface="Cambria Math" panose="02040503050406030204" pitchFamily="18" charset="0"/>
                                     </a:rPr>
                                   </m:ctrlPr>
@@ -9376,6 +9374,7 @@
                               <m:ctrlPr>
                                 <a:rPr lang="en-US" sz="2600" i="1">
                                   <a:latin typeface="Cambria Math" panose="02040503050406030204" pitchFamily="18" charset="0"/>
+                                  <a:ea typeface="Cambria Math" panose="02040503050406030204" pitchFamily="18" charset="0"/>
                                 </a:rPr>
                               </m:ctrlPr>
                             </m:sSubPr>
@@ -9392,7 +9391,7 @@
                               <m:sSub>
                                 <m:sSubPr>
                                   <m:ctrlPr>
-                                    <a:rPr lang="en-US" sz="2600" i="1">
+                                    <a:rPr lang="en-US" sz="2600" b="1" i="1">
                                       <a:latin typeface="Cambria Math" panose="02040503050406030204" pitchFamily="18" charset="0"/>
                                     </a:rPr>
                                   </m:ctrlPr>
@@ -9442,7 +9441,7 @@
                     <m:sSub>
                       <m:sSubPr>
                         <m:ctrlPr>
-                          <a:rPr lang="en-US" i="1" smtClean="0">
+                          <a:rPr lang="en-US" i="1">
                             <a:latin typeface="Cambria Math" panose="02040503050406030204" pitchFamily="18" charset="0"/>
                           </a:rPr>
                         </m:ctrlPr>
@@ -9511,6 +9510,7 @@
                         <m:ctrlPr>
                           <a:rPr lang="en-US" i="1">
                             <a:latin typeface="Cambria Math" panose="02040503050406030204" pitchFamily="18" charset="0"/>
+                            <a:ea typeface="Cambria Math" panose="02040503050406030204" pitchFamily="18" charset="0"/>
                           </a:rPr>
                         </m:ctrlPr>
                       </m:sSubPr>
@@ -9527,7 +9527,7 @@
                         <m:sSub>
                           <m:sSubPr>
                             <m:ctrlPr>
-                              <a:rPr lang="en-US" i="1">
+                              <a:rPr lang="en-US" b="1" i="1">
                                 <a:latin typeface="Cambria Math" panose="02040503050406030204" pitchFamily="18" charset="0"/>
                               </a:rPr>
                             </m:ctrlPr>
@@ -9564,6 +9564,7 @@
                         <m:ctrlPr>
                           <a:rPr lang="en-US" i="1">
                             <a:latin typeface="Cambria Math" panose="02040503050406030204" pitchFamily="18" charset="0"/>
+                            <a:ea typeface="Cambria Math" panose="02040503050406030204" pitchFamily="18" charset="0"/>
                           </a:rPr>
                         </m:ctrlPr>
                       </m:sSubPr>
@@ -9580,7 +9581,7 @@
                         <m:sSub>
                           <m:sSubPr>
                             <m:ctrlPr>
-                              <a:rPr lang="en-US" i="1">
+                              <a:rPr lang="en-US" b="1" i="1">
                                 <a:latin typeface="Cambria Math" panose="02040503050406030204" pitchFamily="18" charset="0"/>
                               </a:rPr>
                             </m:ctrlPr>
@@ -9660,7 +9661,7 @@
                     <m:sSub>
                       <m:sSubPr>
                         <m:ctrlPr>
-                          <a:rPr lang="en-US" i="1">
+                          <a:rPr lang="en-US" b="1" i="1">
                             <a:latin typeface="Cambria Math" panose="02040503050406030204" pitchFamily="18" charset="0"/>
                           </a:rPr>
                         </m:ctrlPr>
@@ -11864,8 +11865,8 @@
           </a:p>
         </p:txBody>
       </p:sp>
-      <mc:AlternateContent xmlns:mc="http://schemas.openxmlformats.org/markup-compatibility/2006">
-        <mc:Choice xmlns:a14="http://schemas.microsoft.com/office/drawing/2010/main" Requires="a14">
+      <mc:AlternateContent xmlns:mc="http://schemas.openxmlformats.org/markup-compatibility/2006" xmlns:a14="http://schemas.microsoft.com/office/drawing/2010/main">
+        <mc:Choice Requires="a14">
           <p:sp>
             <p:nvSpPr>
               <p:cNvPr id="3" name="Espaço Reservado para Conteúdo 2">
@@ -11903,7 +11904,7 @@
                     <m:sSub>
                       <m:sSubPr>
                         <m:ctrlPr>
-                          <a:rPr lang="pt-BR" i="1" smtClean="0">
+                          <a:rPr lang="pt-BR" i="1">
                             <a:latin typeface="Cambria Math" panose="02040503050406030204" pitchFamily="18" charset="0"/>
                           </a:rPr>
                         </m:ctrlPr>
@@ -12007,14 +12008,11 @@
                 </a:pPr>
                 <a14:m>
                   <m:oMathPara xmlns:m="http://schemas.openxmlformats.org/officeDocument/2006/math">
-                    <m:oMathParaPr>
-                      <m:jc m:val="centerGroup"/>
-                    </m:oMathParaPr>
-                    <m:oMath xmlns:m="http://schemas.openxmlformats.org/officeDocument/2006/math">
+                    <m:oMath>
                       <m:sSub>
                         <m:sSubPr>
                           <m:ctrlPr>
-                            <a:rPr lang="pt-BR" i="1" smtClean="0">
+                            <a:rPr lang="pt-BR" i="1">
                               <a:latin typeface="Cambria Math" panose="02040503050406030204" pitchFamily="18" charset="0"/>
                             </a:rPr>
                           </m:ctrlPr>
@@ -12795,7 +12793,7 @@
             </p:txBody>
           </p:sp>
         </mc:Choice>
-        <mc:Fallback>
+        <mc:Fallback xmlns="">
           <p:sp>
             <p:nvSpPr>
               <p:cNvPr id="3" name="Espaço Reservado para Conteúdo 2">
@@ -12967,8 +12965,8 @@
         </p:nvSpPr>
         <p:spPr>
           <a:xfrm>
-            <a:off x="838199" y="1767155"/>
-            <a:ext cx="11254483" cy="5090844"/>
+            <a:off x="838199" y="1776208"/>
+            <a:ext cx="11353801" cy="5090844"/>
           </a:xfrm>
         </p:spPr>
         <p:txBody>
@@ -12991,11 +12989,11 @@
                   <a:srgbClr val="00B050"/>
                 </a:solidFill>
               </a:rPr>
-              <a:t>valor do passo de aprendizagem </a:t>
+              <a:t>valor da taxa de aprendizagem </a:t>
             </a:r>
             <a:r>
               <a:rPr lang="pt-BR" b="1" i="1" dirty="0"/>
-              <a:t>influencia no processo aprendizagem</a:t>
+              <a:t>influencia no processo de aprendizagem</a:t>
             </a:r>
             <a:r>
               <a:rPr lang="pt-BR" dirty="0"/>
@@ -13051,7 +13049,7 @@
                   <a:srgbClr val="00B050"/>
                 </a:solidFill>
               </a:rPr>
-              <a:t>reduzir o valor do passo de aprendizagem ao longo do treinamento </a:t>
+              <a:t>reduzir o valor da taxa de aprendizagem ao longo do treinamento </a:t>
             </a:r>
             <a:r>
               <a:rPr lang="pt-BR" dirty="0"/>
@@ -13283,15 +13281,12 @@
                 </a:pPr>
                 <a14:m>
                   <m:oMathPara xmlns:m="http://schemas.openxmlformats.org/officeDocument/2006/math">
-                    <m:oMathParaPr>
-                      <m:jc m:val="centerGroup"/>
-                    </m:oMathParaPr>
-                    <m:oMath xmlns:m="http://schemas.openxmlformats.org/officeDocument/2006/math">
+                    <m:oMath>
                       <m:r>
                         <a:rPr lang="pt-BR" i="1">
                           <a:latin typeface="Cambria Math" panose="02040503050406030204" pitchFamily="18" charset="0"/>
                         </a:rPr>
-                        <m:t>h</m:t>
+                        <m:t>ℎ</m:t>
                       </m:r>
                       <m:d>
                         <m:dPr>
@@ -13629,7 +13624,7 @@
                       <m:sSup>
                         <m:sSupPr>
                           <m:ctrlPr>
-                            <a:rPr lang="pt-BR" b="0" i="1" smtClean="0">
+                            <a:rPr lang="pt-BR" b="1" i="1" smtClean="0">
                               <a:latin typeface="Cambria Math" panose="02040503050406030204" pitchFamily="18" charset="0"/>
                             </a:rPr>
                           </m:ctrlPr>
@@ -13756,7 +13751,7 @@
                             <m:begChr m:val="["/>
                             <m:endChr m:val="]"/>
                             <m:ctrlPr>
-                              <a:rPr lang="pt-BR" b="0" i="1" smtClean="0">
+                              <a:rPr lang="pt-BR" i="1">
                                 <a:latin typeface="Cambria Math" panose="02040503050406030204" pitchFamily="18" charset="0"/>
                               </a:rPr>
                             </m:ctrlPr>
@@ -13976,13 +13971,7 @@
                       <a:rPr lang="pt-BR" i="1">
                         <a:latin typeface="Cambria Math" panose="02040503050406030204" pitchFamily="18" charset="0"/>
                       </a:rPr>
-                      <m:t>)</m:t>
-                    </m:r>
-                    <m:r>
-                      <a:rPr lang="pt-BR">
-                        <a:latin typeface="Cambria Math" panose="02040503050406030204" pitchFamily="18" charset="0"/>
-                      </a:rPr>
-                      <m:t>=</m:t>
+                      <m:t>)=</m:t>
                     </m:r>
                     <m:sSup>
                       <m:sSupPr>
@@ -14628,15 +14617,12 @@
                 </a:pPr>
                 <a14:m>
                   <m:oMathPara xmlns:m="http://schemas.openxmlformats.org/officeDocument/2006/math">
-                    <m:oMathParaPr>
-                      <m:jc m:val="centerGroup"/>
-                    </m:oMathParaPr>
-                    <m:oMath xmlns:m="http://schemas.openxmlformats.org/officeDocument/2006/math">
+                    <m:oMath>
                       <m:r>
                         <a:rPr lang="pt-BR" i="1" smtClean="0">
                           <a:latin typeface="Cambria Math" panose="02040503050406030204" pitchFamily="18" charset="0"/>
                         </a:rPr>
-                        <m:t>h</m:t>
+                        <m:t>ℎ</m:t>
                       </m:r>
                       <m:d>
                         <m:dPr>
@@ -15032,10 +15018,7 @@
                 </a:pPr>
                 <a14:m>
                   <m:oMathPara xmlns:m="http://schemas.openxmlformats.org/officeDocument/2006/math">
-                    <m:oMathParaPr>
-                      <m:jc m:val="centerGroup"/>
-                    </m:oMathParaPr>
-                    <m:oMath xmlns:m="http://schemas.openxmlformats.org/officeDocument/2006/math">
+                    <m:oMath>
                       <m:r>
                         <a:rPr lang="pt-BR" b="1" i="1" smtClean="0">
                           <a:latin typeface="Cambria Math" panose="02040503050406030204" pitchFamily="18" charset="0"/>
@@ -15113,7 +15096,7 @@
                                 <m:d>
                                   <m:dPr>
                                     <m:ctrlPr>
-                                      <a:rPr lang="pt-BR" i="1">
+                                      <a:rPr lang="pt-BR" b="0" i="1" smtClean="0">
                                         <a:latin typeface="Cambria Math" panose="02040503050406030204" pitchFamily="18" charset="0"/>
                                       </a:rPr>
                                     </m:ctrlPr>
@@ -15194,7 +15177,7 @@
                                       <m:d>
                                         <m:dPr>
                                           <m:ctrlPr>
-                                            <a:rPr lang="pt-BR" i="1">
+                                            <a:rPr lang="pt-BR" b="0" i="1" smtClean="0">
                                               <a:latin typeface="Cambria Math" panose="02040503050406030204" pitchFamily="18" charset="0"/>
                                             </a:rPr>
                                           </m:ctrlPr>
@@ -15286,7 +15269,7 @@
                                             <m:d>
                                               <m:dPr>
                                                 <m:ctrlPr>
-                                                  <a:rPr lang="pt-BR" i="1">
+                                                  <a:rPr lang="pt-BR" b="0" i="1" smtClean="0">
                                                     <a:latin typeface="Cambria Math" panose="02040503050406030204" pitchFamily="18" charset="0"/>
                                                   </a:rPr>
                                                 </m:ctrlPr>
@@ -15409,7 +15392,7 @@
                                 <m:d>
                                   <m:dPr>
                                     <m:ctrlPr>
-                                      <a:rPr lang="pt-BR" i="1">
+                                      <a:rPr lang="pt-BR" b="0" i="1" smtClean="0">
                                         <a:latin typeface="Cambria Math" panose="02040503050406030204" pitchFamily="18" charset="0"/>
                                       </a:rPr>
                                     </m:ctrlPr>
@@ -15496,7 +15479,7 @@
                                       <m:d>
                                         <m:dPr>
                                           <m:ctrlPr>
-                                            <a:rPr lang="pt-BR" i="1">
+                                            <a:rPr lang="pt-BR" b="0" i="1" smtClean="0">
                                               <a:latin typeface="Cambria Math" panose="02040503050406030204" pitchFamily="18" charset="0"/>
                                             </a:rPr>
                                           </m:ctrlPr>
@@ -15594,7 +15577,7 @@
                                             <m:d>
                                               <m:dPr>
                                                 <m:ctrlPr>
-                                                  <a:rPr lang="pt-BR" i="1">
+                                                  <a:rPr lang="pt-BR" b="0" i="1" smtClean="0">
                                                     <a:latin typeface="Cambria Math" panose="02040503050406030204" pitchFamily="18" charset="0"/>
                                                   </a:rPr>
                                                 </m:ctrlPr>
@@ -16213,7 +16196,7 @@
                         <m:d>
                           <m:dPr>
                             <m:ctrlPr>
-                              <a:rPr lang="pt-BR" i="1">
+                              <a:rPr lang="pt-BR" b="0" i="1" smtClean="0">
                                 <a:latin typeface="Cambria Math" panose="02040503050406030204" pitchFamily="18" charset="0"/>
                               </a:rPr>
                             </m:ctrlPr>
@@ -16263,7 +16246,7 @@
                     <m:d>
                       <m:dPr>
                         <m:ctrlPr>
-                          <a:rPr lang="pt-BR" i="1">
+                          <a:rPr lang="pt-BR" b="0" i="1" smtClean="0">
                             <a:latin typeface="Cambria Math" panose="02040503050406030204" pitchFamily="18" charset="0"/>
                           </a:rPr>
                         </m:ctrlPr>
@@ -16330,7 +16313,7 @@
                     <m:d>
                       <m:dPr>
                         <m:ctrlPr>
-                          <a:rPr lang="pt-BR" i="1">
+                          <a:rPr lang="pt-BR" b="0" i="1" smtClean="0">
                             <a:latin typeface="Cambria Math" panose="02040503050406030204" pitchFamily="18" charset="0"/>
                           </a:rPr>
                         </m:ctrlPr>
@@ -16370,7 +16353,7 @@
                     <m:d>
                       <m:dPr>
                         <m:ctrlPr>
-                          <a:rPr lang="pt-BR" i="1">
+                          <a:rPr lang="pt-BR" b="0" i="1" smtClean="0">
                             <a:latin typeface="Cambria Math" panose="02040503050406030204" pitchFamily="18" charset="0"/>
                           </a:rPr>
                         </m:ctrlPr>
@@ -16459,7 +16442,7 @@
                         <m:d>
                           <m:dPr>
                             <m:ctrlPr>
-                              <a:rPr lang="pt-BR" i="1">
+                              <a:rPr lang="pt-BR" b="0" i="1" smtClean="0">
                                 <a:latin typeface="Cambria Math" panose="02040503050406030204" pitchFamily="18" charset="0"/>
                               </a:rPr>
                             </m:ctrlPr>
@@ -16524,7 +16507,7 @@
                         <m:d>
                           <m:dPr>
                             <m:ctrlPr>
-                              <a:rPr lang="pt-BR" i="1">
+                              <a:rPr lang="pt-BR" b="0" i="1" smtClean="0">
                                 <a:latin typeface="Cambria Math" panose="02040503050406030204" pitchFamily="18" charset="0"/>
                               </a:rPr>
                             </m:ctrlPr>
@@ -16555,7 +16538,7 @@
                     <m:d>
                       <m:dPr>
                         <m:ctrlPr>
-                          <a:rPr lang="pt-BR" i="1">
+                          <a:rPr lang="pt-BR" b="0" i="1" smtClean="0">
                             <a:latin typeface="Cambria Math" panose="02040503050406030204" pitchFamily="18" charset="0"/>
                           </a:rPr>
                         </m:ctrlPr>
@@ -16614,7 +16597,7 @@
                     <m:d>
                       <m:dPr>
                         <m:ctrlPr>
-                          <a:rPr lang="pt-BR" i="1" smtClean="0">
+                          <a:rPr lang="pt-BR" b="0" i="1" smtClean="0">
                             <a:latin typeface="Cambria Math" panose="02040503050406030204" pitchFamily="18" charset="0"/>
                           </a:rPr>
                         </m:ctrlPr>
@@ -16645,7 +16628,7 @@
                     <m:d>
                       <m:dPr>
                         <m:ctrlPr>
-                          <a:rPr lang="pt-BR" i="1">
+                          <a:rPr lang="pt-BR" b="0" i="1" smtClean="0">
                             <a:latin typeface="Cambria Math" panose="02040503050406030204" pitchFamily="18" charset="0"/>
                           </a:rPr>
                         </m:ctrlPr>
@@ -16676,7 +16659,7 @@
                     <m:d>
                       <m:dPr>
                         <m:ctrlPr>
-                          <a:rPr lang="pt-BR" i="1">
+                          <a:rPr lang="pt-BR">
                             <a:latin typeface="Cambria Math" panose="02040503050406030204" pitchFamily="18" charset="0"/>
                             <a:ea typeface="Cambria Math" panose="02040503050406030204" pitchFamily="18" charset="0"/>
                           </a:rPr>
@@ -18779,8 +18762,8 @@
           </a:p>
         </p:txBody>
       </p:sp>
-      <mc:AlternateContent xmlns:mc="http://schemas.openxmlformats.org/markup-compatibility/2006" xmlns:a14="http://schemas.microsoft.com/office/drawing/2010/main">
-        <mc:Choice Requires="a14">
+      <mc:AlternateContent xmlns:mc="http://schemas.openxmlformats.org/markup-compatibility/2006">
+        <mc:Choice xmlns:a14="http://schemas.microsoft.com/office/drawing/2010/main" Requires="a14">
           <p:sp>
             <p:nvSpPr>
               <p:cNvPr id="3" name="Espaço Reservado para Conteúdo 2">
@@ -18800,7 +18783,7 @@
             <p:spPr>
               <a:xfrm>
                 <a:off x="838201" y="1825625"/>
-                <a:ext cx="11141466" cy="5032376"/>
+                <a:ext cx="11244208" cy="5032376"/>
               </a:xfrm>
             </p:spPr>
             <p:txBody>
@@ -18809,7 +18792,7 @@
               <a:p>
                 <a:r>
                   <a:rPr lang="pt-BR" dirty="0"/>
-                  <a:t>Como vimos no laboratório #3, nem toda superfície de erro criada a partir da função do EQM tem formato de tigela (i.e., com curvas de erro circulares).</a:t>
+                  <a:t>Como visto no laboratório #3, nem toda superfície de erro criada a partir da função do EQM tem formato de tigela (i.e., com curvas de erro circulares).</a:t>
                 </a:r>
               </a:p>
               <a:p>
@@ -18852,7 +18835,7 @@
                     <m:sSub>
                       <m:sSubPr>
                         <m:ctrlPr>
-                          <a:rPr lang="pt-BR" i="1" smtClean="0">
+                          <a:rPr lang="pt-BR" i="1">
                             <a:latin typeface="Cambria Math" panose="02040503050406030204" pitchFamily="18" charset="0"/>
                           </a:rPr>
                         </m:ctrlPr>
@@ -18940,7 +18923,7 @@
             </p:txBody>
           </p:sp>
         </mc:Choice>
-        <mc:Fallback xmlns="">
+        <mc:Fallback>
           <p:sp>
             <p:nvSpPr>
               <p:cNvPr id="3" name="Espaço Reservado para Conteúdo 2">
@@ -18960,12 +18943,12 @@
             <p:spPr>
               <a:xfrm>
                 <a:off x="838201" y="1825625"/>
-                <a:ext cx="11141466" cy="5032376"/>
+                <a:ext cx="11244208" cy="5032376"/>
               </a:xfrm>
               <a:blipFill>
                 <a:blip r:embed="rId3"/>
                 <a:stretch>
-                  <a:fillRect l="-985" t="-1937" r="-1095"/>
+                  <a:fillRect l="-976" t="-1937"/>
                 </a:stretch>
               </a:blipFill>
             </p:spPr>
@@ -18974,7 +18957,7 @@
               <a:lstStyle/>
               <a:p>
                 <a:r>
-                  <a:rPr lang="pt-BR">
+                  <a:rPr lang="en-US">
                     <a:noFill/>
                   </a:rPr>
                   <a:t> </a:t>
@@ -19020,11 +19003,11 @@
                     <m:oMathParaPr>
                       <m:jc m:val="center"/>
                     </m:oMathParaPr>
-                    <m:oMath xmlns:m="http://schemas.openxmlformats.org/officeDocument/2006/math">
+                    <m:oMath>
                       <m:sSub>
                         <m:sSubPr>
                           <m:ctrlPr>
-                            <a:rPr lang="pt-BR" sz="2400" i="1" smtClean="0">
+                            <a:rPr lang="pt-BR" sz="2400" i="1">
                               <a:latin typeface="Cambria Math" panose="02040503050406030204" pitchFamily="18" charset="0"/>
                             </a:rPr>
                           </m:ctrlPr>
@@ -19049,8 +19032,9 @@
                       <m:d>
                         <m:dPr>
                           <m:ctrlPr>
-                            <a:rPr lang="pt-BR" sz="2400" i="1">
+                            <a:rPr lang="pt-BR" sz="2400" b="1" i="1">
                               <a:latin typeface="Cambria Math" panose="02040503050406030204" pitchFamily="18" charset="0"/>
+                              <a:ea typeface="Cambria Math" panose="02040503050406030204" pitchFamily="18" charset="0"/>
                             </a:rPr>
                           </m:ctrlPr>
                         </m:dPr>
@@ -19136,7 +19120,7 @@
                           <m:sSup>
                             <m:sSupPr>
                               <m:ctrlPr>
-                                <a:rPr lang="pt-BR" sz="2400" i="1">
+                                <a:rPr lang="pt-BR" sz="2400" i="1" smtClean="0">
                                   <a:latin typeface="Cambria Math" panose="02040503050406030204" pitchFamily="18" charset="0"/>
                                 </a:rPr>
                               </m:ctrlPr>
@@ -19147,7 +19131,7 @@
                                   <m:begChr m:val="["/>
                                   <m:endChr m:val="]"/>
                                   <m:ctrlPr>
-                                    <a:rPr lang="pt-BR" sz="2400" i="1" smtClean="0">
+                                    <a:rPr lang="pt-BR" sz="2400" i="1">
                                       <a:latin typeface="Cambria Math" panose="02040503050406030204" pitchFamily="18" charset="0"/>
                                     </a:rPr>
                                   </m:ctrlPr>
@@ -19211,8 +19195,10 @@
                                       <m:groupChr>
                                         <m:groupChrPr>
                                           <m:chr m:val="⏟"/>
+                                          <m:pos m:val="bot"/>
+                                          <m:vertJc m:val="top"/>
                                           <m:ctrlPr>
-                                            <a:rPr lang="pt-BR" sz="2400" i="1" smtClean="0">
+                                            <a:rPr lang="pt-BR" sz="2400" i="1">
                                               <a:latin typeface="Cambria Math" panose="02040503050406030204" pitchFamily="18" charset="0"/>
                                             </a:rPr>
                                           </m:ctrlPr>
@@ -19800,14 +19786,11 @@
                 <a:pPr/>
                 <a14:m>
                   <m:oMathPara xmlns:m="http://schemas.openxmlformats.org/officeDocument/2006/math">
-                    <m:oMathParaPr>
-                      <m:jc m:val="centerGroup"/>
-                    </m:oMathParaPr>
-                    <m:oMath xmlns:m="http://schemas.openxmlformats.org/officeDocument/2006/math">
+                    <m:oMath>
                       <m:sSub>
                         <m:sSubPr>
                           <m:ctrlPr>
-                            <a:rPr lang="pt-BR" i="1" smtClean="0">
+                            <a:rPr lang="pt-BR" i="1">
                               <a:latin typeface="Cambria Math" panose="02040503050406030204" pitchFamily="18" charset="0"/>
                             </a:rPr>
                           </m:ctrlPr>
@@ -20684,10 +20667,7 @@
                 </a:pPr>
                 <a14:m>
                   <m:oMathPara xmlns:m="http://schemas.openxmlformats.org/officeDocument/2006/math">
-                    <m:oMathParaPr>
-                      <m:jc m:val="centerGroup"/>
-                    </m:oMathParaPr>
-                    <m:oMath xmlns:m="http://schemas.openxmlformats.org/officeDocument/2006/math">
+                    <m:oMath>
                       <m:acc>
                         <m:accPr>
                           <m:chr m:val="̂"/>
@@ -20856,14 +20836,11 @@
                 </a:pPr>
                 <a14:m>
                   <m:oMathPara xmlns:m="http://schemas.openxmlformats.org/officeDocument/2006/math">
-                    <m:oMathParaPr>
-                      <m:jc m:val="centerGroup"/>
-                    </m:oMathParaPr>
-                    <m:oMath xmlns:m="http://schemas.openxmlformats.org/officeDocument/2006/math">
+                    <m:oMath>
                       <m:sSub>
                         <m:sSubPr>
                           <m:ctrlPr>
-                            <a:rPr lang="en-US" i="1">
+                            <a:rPr lang="pt-BR" i="1">
                               <a:latin typeface="Cambria Math" panose="02040503050406030204" pitchFamily="18" charset="0"/>
                             </a:rPr>
                           </m:ctrlPr>
@@ -20872,7 +20849,7 @@
                           <m:sSup>
                             <m:sSupPr>
                               <m:ctrlPr>
-                                <a:rPr lang="pt-BR" i="1">
+                                <a:rPr lang="en-US" i="1">
                                   <a:latin typeface="Cambria Math" panose="02040503050406030204" pitchFamily="18" charset="0"/>
                                 </a:rPr>
                               </m:ctrlPr>
@@ -20989,6 +20966,7 @@
                               <m:ctrlPr>
                                 <a:rPr lang="en-US" i="1">
                                   <a:latin typeface="Cambria Math" panose="02040503050406030204" pitchFamily="18" charset="0"/>
+                                  <a:ea typeface="Cambria Math" panose="02040503050406030204" pitchFamily="18" charset="0"/>
                                 </a:rPr>
                               </m:ctrlPr>
                             </m:sSubPr>
@@ -21005,7 +20983,7 @@
                               <m:sSub>
                                 <m:sSubPr>
                                   <m:ctrlPr>
-                                    <a:rPr lang="en-US" i="1">
+                                    <a:rPr lang="en-US" b="1" i="1">
                                       <a:latin typeface="Cambria Math" panose="02040503050406030204" pitchFamily="18" charset="0"/>
                                     </a:rPr>
                                   </m:ctrlPr>
@@ -21036,6 +21014,7 @@
                               <m:ctrlPr>
                                 <a:rPr lang="en-US" i="1">
                                   <a:latin typeface="Cambria Math" panose="02040503050406030204" pitchFamily="18" charset="0"/>
+                                  <a:ea typeface="Cambria Math" panose="02040503050406030204" pitchFamily="18" charset="0"/>
                                 </a:rPr>
                               </m:ctrlPr>
                             </m:sSubPr>
@@ -21052,7 +21031,7 @@
                               <m:sSub>
                                 <m:sSubPr>
                                   <m:ctrlPr>
-                                    <a:rPr lang="en-US" i="1">
+                                    <a:rPr lang="en-US" b="1" i="1">
                                       <a:latin typeface="Cambria Math" panose="02040503050406030204" pitchFamily="18" charset="0"/>
                                     </a:rPr>
                                   </m:ctrlPr>
@@ -21153,7 +21132,7 @@
                     <m:sSub>
                       <m:sSubPr>
                         <m:ctrlPr>
-                          <a:rPr lang="en-US" i="1">
+                          <a:rPr lang="en-US" b="1" i="1">
                             <a:latin typeface="Cambria Math" panose="02040503050406030204" pitchFamily="18" charset="0"/>
                           </a:rPr>
                         </m:ctrlPr>
@@ -21377,10 +21356,7 @@
                 </a:pPr>
                 <a14:m>
                   <m:oMathPara xmlns:m="http://schemas.openxmlformats.org/officeDocument/2006/math">
-                    <m:oMathParaPr>
-                      <m:jc m:val="centerGroup"/>
-                    </m:oMathParaPr>
-                    <m:oMath xmlns:m="http://schemas.openxmlformats.org/officeDocument/2006/math">
+                    <m:oMath>
                       <m:sSub>
                         <m:sSubPr>
                           <m:ctrlPr>
@@ -21484,6 +21460,7 @@
                           <m:ctrlPr>
                             <a:rPr lang="en-US" i="1">
                               <a:latin typeface="Cambria Math" panose="02040503050406030204" pitchFamily="18" charset="0"/>
+                              <a:ea typeface="Cambria Math" panose="02040503050406030204" pitchFamily="18" charset="0"/>
                             </a:rPr>
                           </m:ctrlPr>
                         </m:sSubPr>
@@ -21500,7 +21477,7 @@
                           <m:sSub>
                             <m:sSubPr>
                               <m:ctrlPr>
-                                <a:rPr lang="en-US" i="1">
+                                <a:rPr lang="en-US" b="1" i="1">
                                   <a:latin typeface="Cambria Math" panose="02040503050406030204" pitchFamily="18" charset="0"/>
                                 </a:rPr>
                               </m:ctrlPr>
@@ -21536,6 +21513,7 @@
                           <m:ctrlPr>
                             <a:rPr lang="en-US" i="1">
                               <a:latin typeface="Cambria Math" panose="02040503050406030204" pitchFamily="18" charset="0"/>
+                              <a:ea typeface="Cambria Math" panose="02040503050406030204" pitchFamily="18" charset="0"/>
                             </a:rPr>
                           </m:ctrlPr>
                         </m:sSubPr>
@@ -21552,7 +21530,7 @@
                           <m:sSub>
                             <m:sSubPr>
                               <m:ctrlPr>
-                                <a:rPr lang="en-US" i="1">
+                                <a:rPr lang="en-US" b="1" i="1">
                                   <a:latin typeface="Cambria Math" panose="02040503050406030204" pitchFamily="18" charset="0"/>
                                 </a:rPr>
                               </m:ctrlPr>
@@ -21650,10 +21628,7 @@
                 </a:pPr>
                 <a14:m>
                   <m:oMathPara xmlns:m="http://schemas.openxmlformats.org/officeDocument/2006/math">
-                    <m:oMathParaPr>
-                      <m:jc m:val="centerGroup"/>
-                    </m:oMathParaPr>
-                    <m:oMath xmlns:m="http://schemas.openxmlformats.org/officeDocument/2006/math">
+                    <m:oMath>
                       <m:acc>
                         <m:accPr>
                           <m:chr m:val="̂"/>
@@ -21796,6 +21771,7 @@
                               <m:ctrlPr>
                                 <a:rPr lang="en-US" i="1">
                                   <a:latin typeface="Cambria Math" panose="02040503050406030204" pitchFamily="18" charset="0"/>
+                                  <a:ea typeface="Cambria Math" panose="02040503050406030204" pitchFamily="18" charset="0"/>
                                 </a:rPr>
                               </m:ctrlPr>
                             </m:sSubPr>
@@ -21812,7 +21788,7 @@
                               <m:sSub>
                                 <m:sSubPr>
                                   <m:ctrlPr>
-                                    <a:rPr lang="en-US" i="1">
+                                    <a:rPr lang="en-US" b="1" i="1">
                                       <a:latin typeface="Cambria Math" panose="02040503050406030204" pitchFamily="18" charset="0"/>
                                     </a:rPr>
                                   </m:ctrlPr>
@@ -21848,6 +21824,7 @@
                               <m:ctrlPr>
                                 <a:rPr lang="en-US" i="1">
                                   <a:latin typeface="Cambria Math" panose="02040503050406030204" pitchFamily="18" charset="0"/>
+                                  <a:ea typeface="Cambria Math" panose="02040503050406030204" pitchFamily="18" charset="0"/>
                                 </a:rPr>
                               </m:ctrlPr>
                             </m:sSubPr>
@@ -21864,7 +21841,7 @@
                               <m:sSub>
                                 <m:sSubPr>
                                   <m:ctrlPr>
-                                    <a:rPr lang="en-US" i="1">
+                                    <a:rPr lang="en-US" b="1" i="1">
                                       <a:latin typeface="Cambria Math" panose="02040503050406030204" pitchFamily="18" charset="0"/>
                                     </a:rPr>
                                   </m:ctrlPr>
@@ -21938,6 +21915,7 @@
                           <m:ctrlPr>
                             <a:rPr lang="en-US" i="1">
                               <a:latin typeface="Cambria Math" panose="02040503050406030204" pitchFamily="18" charset="0"/>
+                              <a:ea typeface="Cambria Math" panose="02040503050406030204" pitchFamily="18" charset="0"/>
                             </a:rPr>
                           </m:ctrlPr>
                         </m:sSubPr>
@@ -21954,7 +21932,7 @@
                           <m:sSub>
                             <m:sSubPr>
                               <m:ctrlPr>
-                                <a:rPr lang="en-US" i="1">
+                                <a:rPr lang="en-US" b="1" i="1">
                                   <a:latin typeface="Cambria Math" panose="02040503050406030204" pitchFamily="18" charset="0"/>
                                 </a:rPr>
                               </m:ctrlPr>
@@ -22076,6 +22054,7 @@
                           <m:ctrlPr>
                             <a:rPr lang="en-US" i="1">
                               <a:latin typeface="Cambria Math" panose="02040503050406030204" pitchFamily="18" charset="0"/>
+                              <a:ea typeface="Cambria Math" panose="02040503050406030204" pitchFamily="18" charset="0"/>
                             </a:rPr>
                           </m:ctrlPr>
                         </m:sSubPr>
@@ -22092,7 +22071,7 @@
                           <m:sSub>
                             <m:sSubPr>
                               <m:ctrlPr>
-                                <a:rPr lang="en-US" i="1">
+                                <a:rPr lang="en-US" b="1" i="1">
                                   <a:latin typeface="Cambria Math" panose="02040503050406030204" pitchFamily="18" charset="0"/>
                                 </a:rPr>
                               </m:ctrlPr>
@@ -22137,7 +22116,7 @@
                     <m:sSub>
                       <m:sSubPr>
                         <m:ctrlPr>
-                          <a:rPr lang="pt-BR" i="1" smtClean="0">
+                          <a:rPr lang="pt-BR" i="1">
                             <a:latin typeface="Cambria Math" panose="02040503050406030204" pitchFamily="18" charset="0"/>
                           </a:rPr>
                         </m:ctrlPr>
@@ -22176,6 +22155,7 @@
                         <m:ctrlPr>
                           <a:rPr lang="en-US" i="1">
                             <a:latin typeface="Cambria Math" panose="02040503050406030204" pitchFamily="18" charset="0"/>
+                            <a:ea typeface="Cambria Math" panose="02040503050406030204" pitchFamily="18" charset="0"/>
                           </a:rPr>
                         </m:ctrlPr>
                       </m:sSubPr>
@@ -22192,7 +22172,7 @@
                         <m:sSub>
                           <m:sSubPr>
                             <m:ctrlPr>
-                              <a:rPr lang="en-US" i="1">
+                              <a:rPr lang="en-US" b="1" i="1">
                                 <a:latin typeface="Cambria Math" panose="02040503050406030204" pitchFamily="18" charset="0"/>
                               </a:rPr>
                             </m:ctrlPr>
@@ -22266,6 +22246,7 @@
                         <m:ctrlPr>
                           <a:rPr lang="en-US" i="1">
                             <a:latin typeface="Cambria Math" panose="02040503050406030204" pitchFamily="18" charset="0"/>
+                            <a:ea typeface="Cambria Math" panose="02040503050406030204" pitchFamily="18" charset="0"/>
                           </a:rPr>
                         </m:ctrlPr>
                       </m:sSubPr>
@@ -22282,7 +22263,7 @@
                         <m:sSub>
                           <m:sSubPr>
                             <m:ctrlPr>
-                              <a:rPr lang="en-US" i="1">
+                              <a:rPr lang="en-US" b="1" i="1">
                                 <a:latin typeface="Cambria Math" panose="02040503050406030204" pitchFamily="18" charset="0"/>
                               </a:rPr>
                             </m:ctrlPr>
@@ -22457,10 +22438,7 @@
                 </a:pPr>
                 <a14:m>
                   <m:oMathPara xmlns:m="http://schemas.openxmlformats.org/officeDocument/2006/math">
-                    <m:oMathParaPr>
-                      <m:jc m:val="centerGroup"/>
-                    </m:oMathParaPr>
-                    <m:oMath xmlns:m="http://schemas.openxmlformats.org/officeDocument/2006/math">
+                    <m:oMath>
                       <m:acc>
                         <m:accPr>
                           <m:chr m:val="̂"/>
@@ -22638,13 +22616,7 @@
                         <a:rPr lang="pt-BR" i="1">
                           <a:latin typeface="Cambria Math" panose="02040503050406030204" pitchFamily="18" charset="0"/>
                         </a:rPr>
-                        <m:t>)</m:t>
-                      </m:r>
-                      <m:r>
-                        <a:rPr lang="pt-BR">
-                          <a:latin typeface="Cambria Math" panose="02040503050406030204" pitchFamily="18" charset="0"/>
-                        </a:rPr>
-                        <m:t>,</m:t>
+                        <m:t>),</m:t>
                       </m:r>
                     </m:oMath>
                   </m:oMathPara>
@@ -22752,6 +22724,7 @@
                         <m:ctrlPr>
                           <a:rPr lang="en-US" i="1">
                             <a:latin typeface="Cambria Math" panose="02040503050406030204" pitchFamily="18" charset="0"/>
+                            <a:ea typeface="Cambria Math" panose="02040503050406030204" pitchFamily="18" charset="0"/>
                           </a:rPr>
                         </m:ctrlPr>
                       </m:sSubPr>
@@ -22768,7 +22741,7 @@
                         <m:sSub>
                           <m:sSubPr>
                             <m:ctrlPr>
-                              <a:rPr lang="en-US" i="1">
+                              <a:rPr lang="en-US" b="1" i="1">
                                 <a:latin typeface="Cambria Math" panose="02040503050406030204" pitchFamily="18" charset="0"/>
                               </a:rPr>
                             </m:ctrlPr>
@@ -22891,6 +22864,7 @@
                         <m:ctrlPr>
                           <a:rPr lang="en-US" i="1">
                             <a:latin typeface="Cambria Math" panose="02040503050406030204" pitchFamily="18" charset="0"/>
+                            <a:ea typeface="Cambria Math" panose="02040503050406030204" pitchFamily="18" charset="0"/>
                           </a:rPr>
                         </m:ctrlPr>
                       </m:sSubPr>
@@ -22907,7 +22881,7 @@
                         <m:sSub>
                           <m:sSubPr>
                             <m:ctrlPr>
-                              <a:rPr lang="en-US" i="1">
+                              <a:rPr lang="en-US" b="1" i="1">
                                 <a:latin typeface="Cambria Math" panose="02040503050406030204" pitchFamily="18" charset="0"/>
                               </a:rPr>
                             </m:ctrlPr>
@@ -22948,7 +22922,7 @@
                     <m:sSub>
                       <m:sSubPr>
                         <m:ctrlPr>
-                          <a:rPr lang="pt-BR" i="1" smtClean="0">
+                          <a:rPr lang="pt-BR" i="1">
                             <a:latin typeface="Cambria Math" panose="02040503050406030204" pitchFamily="18" charset="0"/>
                           </a:rPr>
                         </m:ctrlPr>
@@ -24181,14 +24155,11 @@
                   <a:pPr/>
                   <a14:m>
                     <m:oMathPara xmlns:m="http://schemas.openxmlformats.org/officeDocument/2006/math">
-                      <m:oMathParaPr>
-                        <m:jc m:val="centerGroup"/>
-                      </m:oMathParaPr>
-                      <m:oMath xmlns:m="http://schemas.openxmlformats.org/officeDocument/2006/math">
+                      <m:oMath>
                         <m:sSub>
                           <m:sSubPr>
                             <m:ctrlPr>
-                              <a:rPr lang="pt-BR" sz="2000" i="1" smtClean="0">
+                              <a:rPr lang="pt-BR" sz="2000" b="0" i="1" smtClean="0">
                                 <a:latin typeface="Cambria Math" panose="02040503050406030204" pitchFamily="18" charset="0"/>
                               </a:rPr>
                             </m:ctrlPr>
@@ -24284,14 +24255,11 @@
                   <a:pPr/>
                   <a14:m>
                     <m:oMathPara xmlns:m="http://schemas.openxmlformats.org/officeDocument/2006/math">
-                      <m:oMathParaPr>
-                        <m:jc m:val="centerGroup"/>
-                      </m:oMathParaPr>
-                      <m:oMath xmlns:m="http://schemas.openxmlformats.org/officeDocument/2006/math">
+                      <m:oMath>
                         <m:sSub>
                           <m:sSubPr>
                             <m:ctrlPr>
-                              <a:rPr lang="pt-BR" sz="2000" i="1" smtClean="0">
+                              <a:rPr lang="pt-BR" sz="2000" b="0" i="1" smtClean="0">
                                 <a:latin typeface="Cambria Math" panose="02040503050406030204" pitchFamily="18" charset="0"/>
                               </a:rPr>
                             </m:ctrlPr>
@@ -24870,14 +24838,11 @@
                   <a:pPr/>
                   <a14:m>
                     <m:oMathPara xmlns:m="http://schemas.openxmlformats.org/officeDocument/2006/math">
-                      <m:oMathParaPr>
-                        <m:jc m:val="centerGroup"/>
-                      </m:oMathParaPr>
-                      <m:oMath xmlns:m="http://schemas.openxmlformats.org/officeDocument/2006/math">
+                      <m:oMath>
                         <m:sSub>
                           <m:sSubPr>
                             <m:ctrlPr>
-                              <a:rPr lang="pt-BR" sz="2000" i="1" smtClean="0">
+                              <a:rPr lang="pt-BR" sz="2000" b="0" i="1" smtClean="0">
                                 <a:latin typeface="Cambria Math" panose="02040503050406030204" pitchFamily="18" charset="0"/>
                               </a:rPr>
                             </m:ctrlPr>
@@ -24973,14 +24938,11 @@
                   <a:pPr/>
                   <a14:m>
                     <m:oMathPara xmlns:m="http://schemas.openxmlformats.org/officeDocument/2006/math">
-                      <m:oMathParaPr>
-                        <m:jc m:val="centerGroup"/>
-                      </m:oMathParaPr>
-                      <m:oMath xmlns:m="http://schemas.openxmlformats.org/officeDocument/2006/math">
+                      <m:oMath>
                         <m:sSub>
                           <m:sSubPr>
                             <m:ctrlPr>
-                              <a:rPr lang="pt-BR" sz="2000" i="1" smtClean="0">
+                              <a:rPr lang="pt-BR" sz="2000" b="0" i="1" smtClean="0">
                                 <a:latin typeface="Cambria Math" panose="02040503050406030204" pitchFamily="18" charset="0"/>
                               </a:rPr>
                             </m:ctrlPr>
@@ -26871,8 +26833,8 @@
           </a:p>
         </p:txBody>
       </p:sp>
-      <mc:AlternateContent xmlns:mc="http://schemas.openxmlformats.org/markup-compatibility/2006" xmlns:a14="http://schemas.microsoft.com/office/drawing/2010/main">
-        <mc:Choice Requires="a14">
+      <mc:AlternateContent xmlns:mc="http://schemas.openxmlformats.org/markup-compatibility/2006">
+        <mc:Choice xmlns:a14="http://schemas.microsoft.com/office/drawing/2010/main" Requires="a14">
           <p:sp>
             <p:nvSpPr>
               <p:cNvPr id="3" name="Espaço Reservado para Conteúdo 2">
@@ -26892,7 +26854,7 @@
             <p:spPr>
               <a:xfrm>
                 <a:off x="6647952" y="1825624"/>
-                <a:ext cx="5465280" cy="5032375"/>
+                <a:ext cx="5544048" cy="5032375"/>
               </a:xfrm>
             </p:spPr>
             <p:txBody>
@@ -26923,7 +26885,7 @@
                       <a:schemeClr val="tx1"/>
                     </a:solidFill>
                   </a:rPr>
-                  <a:t>fazem com que a </a:t>
+                  <a:t>podem fazer com que a </a:t>
                 </a:r>
                 <a:r>
                   <a:rPr lang="pt-BR" b="1" i="1" dirty="0">
@@ -27007,7 +26969,7 @@
                     </a:solidFill>
                     <a:effectLst/>
                   </a:rPr>
-                  <a:t>em algumas direções (i.e.,).</a:t>
+                  <a:t>em algumas direções.</a:t>
                 </a:r>
               </a:p>
               <a:p>
@@ -27017,7 +26979,7 @@
                 </a:pPr>
                 <a:r>
                   <a:rPr lang="pt-BR" dirty="0"/>
-                  <a:t>Se inclinação </a:t>
+                  <a:t>Se em uma determinada direção a inclinação é </a:t>
                 </a:r>
                 <a14:m>
                   <m:oMath xmlns:m="http://schemas.openxmlformats.org/officeDocument/2006/math">
@@ -27032,7 +26994,7 @@
                 </a14:m>
                 <a:r>
                   <a:rPr lang="pt-BR" dirty="0"/>
-                  <a:t>, o vetor gradiente tende a zero.</a:t>
+                  <a:t>, a derivada parcial tende a zero.</a:t>
                 </a:r>
                 <a:endParaRPr lang="pt-BR" b="0" i="0" dirty="0">
                   <a:solidFill>
@@ -27044,7 +27006,7 @@
             </p:txBody>
           </p:sp>
         </mc:Choice>
-        <mc:Fallback xmlns="">
+        <mc:Fallback>
           <p:sp>
             <p:nvSpPr>
               <p:cNvPr id="3" name="Espaço Reservado para Conteúdo 2">
@@ -27064,12 +27026,12 @@
             <p:spPr>
               <a:xfrm>
                 <a:off x="6647952" y="1825624"/>
-                <a:ext cx="5465280" cy="5032375"/>
+                <a:ext cx="5544048" cy="5032375"/>
               </a:xfrm>
               <a:blipFill>
                 <a:blip r:embed="rId3"/>
                 <a:stretch>
-                  <a:fillRect l="-2009" t="-1937" r="-1562"/>
+                  <a:fillRect l="-1980" t="-1937"/>
                 </a:stretch>
               </a:blipFill>
             </p:spPr>
@@ -27330,8 +27292,8 @@
           </a:p>
         </p:txBody>
       </p:sp>
-      <mc:AlternateContent xmlns:mc="http://schemas.openxmlformats.org/markup-compatibility/2006" xmlns:a14="http://schemas.microsoft.com/office/drawing/2010/main">
-        <mc:Choice Requires="a14">
+      <mc:AlternateContent xmlns:mc="http://schemas.openxmlformats.org/markup-compatibility/2006">
+        <mc:Choice xmlns:a14="http://schemas.microsoft.com/office/drawing/2010/main" Requires="a14">
           <p:sp>
             <p:nvSpPr>
               <p:cNvPr id="3" name="Espaço Reservado para Conteúdo 2">
@@ -27367,7 +27329,7 @@
                     </a:solidFill>
                     <a:effectLst/>
                   </a:rPr>
-                  <a:t>Nessas direções, o </a:t>
+                  <a:t>Nessas direções, </a:t>
                 </a:r>
                 <a:r>
                   <a:rPr lang="pt-BR" b="1" i="1" dirty="0">
@@ -27376,7 +27338,7 @@
                     </a:solidFill>
                     <a:effectLst/>
                   </a:rPr>
-                  <a:t>gradiente da função de erro é muito pequeno</a:t>
+                  <a:t>as derivadas parciais da função de erro são muito pequenas</a:t>
                 </a:r>
                 <a:r>
                   <a:rPr lang="pt-BR" b="0" i="0" dirty="0">
@@ -27425,187 +27387,6 @@
                 </a:r>
               </a:p>
               <a:p>
-                <a:pPr marL="0" indent="0">
-                  <a:buNone/>
-                </a:pPr>
-                <a14:m>
-                  <m:oMathPara xmlns:m="http://schemas.openxmlformats.org/officeDocument/2006/math">
-                    <m:oMathParaPr>
-                      <m:jc m:val="centerGroup"/>
-                    </m:oMathParaPr>
-                    <m:oMath xmlns:m="http://schemas.openxmlformats.org/officeDocument/2006/math">
-                      <m:r>
-                        <a:rPr lang="pt-BR" sz="2800" b="1" i="1" smtClean="0">
-                          <a:solidFill>
-                            <a:schemeClr val="tx1"/>
-                          </a:solidFill>
-                          <a:latin typeface="Cambria Math" panose="02040503050406030204" pitchFamily="18" charset="0"/>
-                        </a:rPr>
-                        <m:t>𝒂</m:t>
-                      </m:r>
-                      <m:r>
-                        <a:rPr lang="en-US" sz="2800" b="1" i="1">
-                          <a:solidFill>
-                            <a:schemeClr val="tx1"/>
-                          </a:solidFill>
-                          <a:latin typeface="Cambria Math" panose="02040503050406030204" pitchFamily="18" charset="0"/>
-                          <a:ea typeface="Cambria Math" panose="02040503050406030204" pitchFamily="18" charset="0"/>
-                        </a:rPr>
-                        <m:t>←</m:t>
-                      </m:r>
-                      <m:r>
-                        <a:rPr lang="pt-BR" sz="2800" b="1" i="1">
-                          <a:solidFill>
-                            <a:schemeClr val="tx1"/>
-                          </a:solidFill>
-                          <a:latin typeface="Cambria Math" panose="02040503050406030204" pitchFamily="18" charset="0"/>
-                        </a:rPr>
-                        <m:t>𝒂</m:t>
-                      </m:r>
-                      <m:r>
-                        <a:rPr lang="pt-BR" sz="2800" i="1">
-                          <a:solidFill>
-                            <a:schemeClr val="tx1"/>
-                          </a:solidFill>
-                          <a:latin typeface="Cambria Math" panose="02040503050406030204" pitchFamily="18" charset="0"/>
-                          <a:ea typeface="Cambria Math" panose="02040503050406030204" pitchFamily="18" charset="0"/>
-                        </a:rPr>
-                        <m:t>−</m:t>
-                      </m:r>
-                      <m:r>
-                        <a:rPr lang="pt-BR" sz="2800" i="1">
-                          <a:solidFill>
-                            <a:schemeClr val="tx1"/>
-                          </a:solidFill>
-                          <a:latin typeface="Cambria Math" panose="02040503050406030204" pitchFamily="18" charset="0"/>
-                          <a:ea typeface="Cambria Math" panose="02040503050406030204" pitchFamily="18" charset="0"/>
-                        </a:rPr>
-                        <m:t>𝛼</m:t>
-                      </m:r>
-                      <m:f>
-                        <m:fPr>
-                          <m:ctrlPr>
-                            <a:rPr lang="pt-BR" sz="2800" i="1">
-                              <a:solidFill>
-                                <a:schemeClr val="tx1"/>
-                              </a:solidFill>
-                              <a:latin typeface="Cambria Math" panose="02040503050406030204" pitchFamily="18" charset="0"/>
-                              <a:ea typeface="Cambria Math" panose="02040503050406030204" pitchFamily="18" charset="0"/>
-                            </a:rPr>
-                          </m:ctrlPr>
-                        </m:fPr>
-                        <m:num>
-                          <m:r>
-                            <a:rPr lang="pt-BR" sz="2800" i="1">
-                              <a:solidFill>
-                                <a:schemeClr val="tx1"/>
-                              </a:solidFill>
-                              <a:latin typeface="Cambria Math" panose="02040503050406030204" pitchFamily="18" charset="0"/>
-                              <a:ea typeface="Cambria Math" panose="02040503050406030204" pitchFamily="18" charset="0"/>
-                            </a:rPr>
-                            <m:t>𝜕</m:t>
-                          </m:r>
-                          <m:sSub>
-                            <m:sSubPr>
-                              <m:ctrlPr>
-                                <a:rPr lang="pt-BR" sz="2800" i="1">
-                                  <a:solidFill>
-                                    <a:schemeClr val="tx1"/>
-                                  </a:solidFill>
-                                  <a:latin typeface="Cambria Math" panose="02040503050406030204" pitchFamily="18" charset="0"/>
-                                  <a:ea typeface="Cambria Math" panose="02040503050406030204" pitchFamily="18" charset="0"/>
-                                </a:rPr>
-                              </m:ctrlPr>
-                            </m:sSubPr>
-                            <m:e>
-                              <m:r>
-                                <a:rPr lang="pt-BR" sz="2800" i="1">
-                                  <a:solidFill>
-                                    <a:schemeClr val="tx1"/>
-                                  </a:solidFill>
-                                  <a:latin typeface="Cambria Math" panose="02040503050406030204" pitchFamily="18" charset="0"/>
-                                  <a:ea typeface="Cambria Math" panose="02040503050406030204" pitchFamily="18" charset="0"/>
-                                </a:rPr>
-                                <m:t>𝐽</m:t>
-                              </m:r>
-                            </m:e>
-                            <m:sub>
-                              <m:r>
-                                <a:rPr lang="pt-BR" sz="2800" i="1">
-                                  <a:solidFill>
-                                    <a:schemeClr val="tx1"/>
-                                  </a:solidFill>
-                                  <a:latin typeface="Cambria Math" panose="02040503050406030204" pitchFamily="18" charset="0"/>
-                                  <a:ea typeface="Cambria Math" panose="02040503050406030204" pitchFamily="18" charset="0"/>
-                                </a:rPr>
-                                <m:t>𝑒</m:t>
-                              </m:r>
-                            </m:sub>
-                          </m:sSub>
-                          <m:r>
-                            <a:rPr lang="pt-BR" sz="2800" i="1">
-                              <a:solidFill>
-                                <a:schemeClr val="tx1"/>
-                              </a:solidFill>
-                              <a:latin typeface="Cambria Math" panose="02040503050406030204" pitchFamily="18" charset="0"/>
-                              <a:ea typeface="Cambria Math" panose="02040503050406030204" pitchFamily="18" charset="0"/>
-                            </a:rPr>
-                            <m:t>(</m:t>
-                          </m:r>
-                          <m:r>
-                            <a:rPr lang="pt-BR" sz="2800" b="1" i="1">
-                              <a:solidFill>
-                                <a:schemeClr val="tx1"/>
-                              </a:solidFill>
-                              <a:latin typeface="Cambria Math" panose="02040503050406030204" pitchFamily="18" charset="0"/>
-                              <a:ea typeface="Cambria Math" panose="02040503050406030204" pitchFamily="18" charset="0"/>
-                            </a:rPr>
-                            <m:t>𝒂</m:t>
-                          </m:r>
-                          <m:r>
-                            <a:rPr lang="pt-BR" sz="2800" i="1">
-                              <a:solidFill>
-                                <a:schemeClr val="tx1"/>
-                              </a:solidFill>
-                              <a:latin typeface="Cambria Math" panose="02040503050406030204" pitchFamily="18" charset="0"/>
-                              <a:ea typeface="Cambria Math" panose="02040503050406030204" pitchFamily="18" charset="0"/>
-                            </a:rPr>
-                            <m:t>)</m:t>
-                          </m:r>
-                        </m:num>
-                        <m:den>
-                          <m:r>
-                            <a:rPr lang="pt-BR" sz="2800" i="1">
-                              <a:solidFill>
-                                <a:schemeClr val="tx1"/>
-                              </a:solidFill>
-                              <a:latin typeface="Cambria Math" panose="02040503050406030204" pitchFamily="18" charset="0"/>
-                              <a:ea typeface="Cambria Math" panose="02040503050406030204" pitchFamily="18" charset="0"/>
-                            </a:rPr>
-                            <m:t>𝜕</m:t>
-                          </m:r>
-                          <m:r>
-                            <a:rPr lang="pt-BR" sz="2800" b="1" i="1">
-                              <a:solidFill>
-                                <a:schemeClr val="tx1"/>
-                              </a:solidFill>
-                              <a:latin typeface="Cambria Math" panose="02040503050406030204" pitchFamily="18" charset="0"/>
-                            </a:rPr>
-                            <m:t>𝒂</m:t>
-                          </m:r>
-                        </m:den>
-                      </m:f>
-                    </m:oMath>
-                  </m:oMathPara>
-                </a14:m>
-                <a:endParaRPr lang="pt-BR" b="0" i="0" dirty="0">
-                  <a:solidFill>
-                    <a:schemeClr val="tx1"/>
-                  </a:solidFill>
-                  <a:effectLst/>
-                </a:endParaRPr>
-              </a:p>
-              <a:p>
                 <a:r>
                   <a:rPr lang="pt-BR" dirty="0"/>
                   <a:t>Na figura ao lado, as derivadas parciais do EQM em relação ao peso </a:t>
@@ -27615,7 +27396,7 @@
                     <m:sSub>
                       <m:sSubPr>
                         <m:ctrlPr>
-                          <a:rPr lang="pt-BR" i="1" smtClean="0">
+                          <a:rPr lang="pt-BR" b="0" i="1" smtClean="0">
                             <a:latin typeface="Cambria Math" panose="02040503050406030204" pitchFamily="18" charset="0"/>
                           </a:rPr>
                         </m:ctrlPr>
@@ -27664,10 +27445,208 @@
                   <a:t>.</a:t>
                 </a:r>
               </a:p>
+              <a:p>
+                <a:pPr marL="0" indent="0">
+                  <a:buNone/>
+                </a:pPr>
+                <a14:m>
+                  <m:oMathPara xmlns:m="http://schemas.openxmlformats.org/officeDocument/2006/math">
+                    <m:oMath>
+                      <m:sSub>
+                        <m:sSubPr>
+                          <m:ctrlPr>
+                            <a:rPr lang="pt-BR" i="1">
+                              <a:latin typeface="Cambria Math" panose="02040503050406030204" pitchFamily="18" charset="0"/>
+                              <a:ea typeface="Cambria Math" panose="02040503050406030204" pitchFamily="18" charset="0"/>
+                            </a:rPr>
+                          </m:ctrlPr>
+                        </m:sSubPr>
+                        <m:e>
+                          <m:r>
+                            <a:rPr lang="pt-BR" i="1">
+                              <a:latin typeface="Cambria Math" panose="02040503050406030204" pitchFamily="18" charset="0"/>
+                              <a:ea typeface="Cambria Math" panose="02040503050406030204" pitchFamily="18" charset="0"/>
+                            </a:rPr>
+                            <m:t>𝑎</m:t>
+                          </m:r>
+                        </m:e>
+                        <m:sub>
+                          <m:r>
+                            <a:rPr lang="pt-BR" i="1">
+                              <a:latin typeface="Cambria Math" panose="02040503050406030204" pitchFamily="18" charset="0"/>
+                              <a:ea typeface="Cambria Math" panose="02040503050406030204" pitchFamily="18" charset="0"/>
+                            </a:rPr>
+                            <m:t>1</m:t>
+                          </m:r>
+                        </m:sub>
+                      </m:sSub>
+                      <m:r>
+                        <a:rPr lang="en-US" i="1">
+                          <a:latin typeface="Cambria Math" panose="02040503050406030204" pitchFamily="18" charset="0"/>
+                          <a:ea typeface="Cambria Math" panose="02040503050406030204" pitchFamily="18" charset="0"/>
+                        </a:rPr>
+                        <m:t>←</m:t>
+                      </m:r>
+                      <m:sSub>
+                        <m:sSubPr>
+                          <m:ctrlPr>
+                            <a:rPr lang="pt-BR" i="1">
+                              <a:latin typeface="Cambria Math" panose="02040503050406030204" pitchFamily="18" charset="0"/>
+                              <a:ea typeface="Cambria Math" panose="02040503050406030204" pitchFamily="18" charset="0"/>
+                            </a:rPr>
+                          </m:ctrlPr>
+                        </m:sSubPr>
+                        <m:e>
+                          <m:r>
+                            <a:rPr lang="pt-BR" i="1">
+                              <a:latin typeface="Cambria Math" panose="02040503050406030204" pitchFamily="18" charset="0"/>
+                              <a:ea typeface="Cambria Math" panose="02040503050406030204" pitchFamily="18" charset="0"/>
+                            </a:rPr>
+                            <m:t>𝑎</m:t>
+                          </m:r>
+                        </m:e>
+                        <m:sub>
+                          <m:r>
+                            <a:rPr lang="pt-BR" i="1">
+                              <a:latin typeface="Cambria Math" panose="02040503050406030204" pitchFamily="18" charset="0"/>
+                              <a:ea typeface="Cambria Math" panose="02040503050406030204" pitchFamily="18" charset="0"/>
+                            </a:rPr>
+                            <m:t>1</m:t>
+                          </m:r>
+                        </m:sub>
+                      </m:sSub>
+                      <m:r>
+                        <a:rPr lang="pt-BR" i="1">
+                          <a:latin typeface="Cambria Math" panose="02040503050406030204" pitchFamily="18" charset="0"/>
+                          <a:ea typeface="Cambria Math" panose="02040503050406030204" pitchFamily="18" charset="0"/>
+                        </a:rPr>
+                        <m:t>−</m:t>
+                      </m:r>
+                      <m:r>
+                        <a:rPr lang="pt-BR" i="1">
+                          <a:latin typeface="Cambria Math" panose="02040503050406030204" pitchFamily="18" charset="0"/>
+                          <a:ea typeface="Cambria Math" panose="02040503050406030204" pitchFamily="18" charset="0"/>
+                        </a:rPr>
+                        <m:t>𝛼</m:t>
+                      </m:r>
+                      <m:f>
+                        <m:fPr>
+                          <m:ctrlPr>
+                            <a:rPr lang="pt-BR" i="1">
+                              <a:latin typeface="Cambria Math" panose="02040503050406030204" pitchFamily="18" charset="0"/>
+                              <a:ea typeface="Cambria Math" panose="02040503050406030204" pitchFamily="18" charset="0"/>
+                            </a:rPr>
+                          </m:ctrlPr>
+                        </m:fPr>
+                        <m:num>
+                          <m:r>
+                            <a:rPr lang="pt-BR" i="1">
+                              <a:latin typeface="Cambria Math" panose="02040503050406030204" pitchFamily="18" charset="0"/>
+                              <a:ea typeface="Cambria Math" panose="02040503050406030204" pitchFamily="18" charset="0"/>
+                            </a:rPr>
+                            <m:t>𝜕</m:t>
+                          </m:r>
+                          <m:sSub>
+                            <m:sSubPr>
+                              <m:ctrlPr>
+                                <a:rPr lang="pt-BR" i="1">
+                                  <a:latin typeface="Cambria Math" panose="02040503050406030204" pitchFamily="18" charset="0"/>
+                                  <a:ea typeface="Cambria Math" panose="02040503050406030204" pitchFamily="18" charset="0"/>
+                                </a:rPr>
+                              </m:ctrlPr>
+                            </m:sSubPr>
+                            <m:e>
+                              <m:r>
+                                <a:rPr lang="pt-BR" i="1">
+                                  <a:latin typeface="Cambria Math" panose="02040503050406030204" pitchFamily="18" charset="0"/>
+                                  <a:ea typeface="Cambria Math" panose="02040503050406030204" pitchFamily="18" charset="0"/>
+                                </a:rPr>
+                                <m:t>𝐽</m:t>
+                              </m:r>
+                            </m:e>
+                            <m:sub>
+                              <m:r>
+                                <a:rPr lang="pt-BR" i="1">
+                                  <a:latin typeface="Cambria Math" panose="02040503050406030204" pitchFamily="18" charset="0"/>
+                                  <a:ea typeface="Cambria Math" panose="02040503050406030204" pitchFamily="18" charset="0"/>
+                                </a:rPr>
+                                <m:t>𝑒</m:t>
+                              </m:r>
+                            </m:sub>
+                          </m:sSub>
+                          <m:r>
+                            <a:rPr lang="pt-BR" i="1">
+                              <a:latin typeface="Cambria Math" panose="02040503050406030204" pitchFamily="18" charset="0"/>
+                              <a:ea typeface="Cambria Math" panose="02040503050406030204" pitchFamily="18" charset="0"/>
+                            </a:rPr>
+                            <m:t>(</m:t>
+                          </m:r>
+                          <m:r>
+                            <a:rPr lang="pt-BR" b="1" i="1">
+                              <a:latin typeface="Cambria Math" panose="02040503050406030204" pitchFamily="18" charset="0"/>
+                              <a:ea typeface="Cambria Math" panose="02040503050406030204" pitchFamily="18" charset="0"/>
+                            </a:rPr>
+                            <m:t>𝒂</m:t>
+                          </m:r>
+                          <m:r>
+                            <a:rPr lang="pt-BR" i="1">
+                              <a:latin typeface="Cambria Math" panose="02040503050406030204" pitchFamily="18" charset="0"/>
+                              <a:ea typeface="Cambria Math" panose="02040503050406030204" pitchFamily="18" charset="0"/>
+                            </a:rPr>
+                            <m:t>)</m:t>
+                          </m:r>
+                        </m:num>
+                        <m:den>
+                          <m:r>
+                            <a:rPr lang="pt-BR" i="1">
+                              <a:latin typeface="Cambria Math" panose="02040503050406030204" pitchFamily="18" charset="0"/>
+                              <a:ea typeface="Cambria Math" panose="02040503050406030204" pitchFamily="18" charset="0"/>
+                            </a:rPr>
+                            <m:t>𝜕</m:t>
+                          </m:r>
+                          <m:sSub>
+                            <m:sSubPr>
+                              <m:ctrlPr>
+                                <a:rPr lang="pt-BR" i="1">
+                                  <a:latin typeface="Cambria Math" panose="02040503050406030204" pitchFamily="18" charset="0"/>
+                                  <a:ea typeface="Cambria Math" panose="02040503050406030204" pitchFamily="18" charset="0"/>
+                                </a:rPr>
+                              </m:ctrlPr>
+                            </m:sSubPr>
+                            <m:e>
+                              <m:r>
+                                <a:rPr lang="pt-BR" i="1">
+                                  <a:latin typeface="Cambria Math" panose="02040503050406030204" pitchFamily="18" charset="0"/>
+                                  <a:ea typeface="Cambria Math" panose="02040503050406030204" pitchFamily="18" charset="0"/>
+                                </a:rPr>
+                                <m:t>𝑎</m:t>
+                              </m:r>
+                            </m:e>
+                            <m:sub>
+                              <m:r>
+                                <a:rPr lang="pt-BR" i="1">
+                                  <a:latin typeface="Cambria Math" panose="02040503050406030204" pitchFamily="18" charset="0"/>
+                                  <a:ea typeface="Cambria Math" panose="02040503050406030204" pitchFamily="18" charset="0"/>
+                                </a:rPr>
+                                <m:t>1</m:t>
+                              </m:r>
+                            </m:sub>
+                          </m:sSub>
+                        </m:den>
+                      </m:f>
+                    </m:oMath>
+                  </m:oMathPara>
+                </a14:m>
+                <a:endParaRPr lang="pt-BR" dirty="0">
+                  <a:solidFill>
+                    <a:schemeClr val="tx1"/>
+                  </a:solidFill>
+                </a:endParaRPr>
+              </a:p>
             </p:txBody>
           </p:sp>
         </mc:Choice>
-        <mc:Fallback xmlns="">
+        <mc:Fallback>
           <p:sp>
             <p:nvSpPr>
               <p:cNvPr id="3" name="Espaço Reservado para Conteúdo 2">
@@ -27692,7 +27671,7 @@
               <a:blipFill>
                 <a:blip r:embed="rId3"/>
                 <a:stretch>
-                  <a:fillRect l="-1496" t="-1937" r="-2494"/>
+                  <a:fillRect l="-1496" t="-1937" r="-1496"/>
                 </a:stretch>
               </a:blipFill>
             </p:spPr>
@@ -27701,7 +27680,7 @@
               <a:lstStyle/>
               <a:p>
                 <a:r>
-                  <a:rPr lang="pt-BR">
+                  <a:rPr lang="en-US">
                     <a:noFill/>
                   </a:rPr>
                   <a:t> </a:t>
@@ -28092,14 +28071,11 @@
                 </a:pPr>
                 <a14:m>
                   <m:oMathPara xmlns:m="http://schemas.openxmlformats.org/officeDocument/2006/math">
-                    <m:oMathParaPr>
-                      <m:jc m:val="centerGroup"/>
-                    </m:oMathParaPr>
-                    <m:oMath xmlns:m="http://schemas.openxmlformats.org/officeDocument/2006/math">
+                    <m:oMath>
                       <m:sSub>
                         <m:sSubPr>
                           <m:ctrlPr>
-                            <a:rPr lang="pt-BR" i="1" smtClean="0">
+                            <a:rPr lang="pt-BR" i="1">
                               <a:latin typeface="Cambria Math" panose="02040503050406030204" pitchFamily="18" charset="0"/>
                             </a:rPr>
                           </m:ctrlPr>
@@ -28124,8 +28100,9 @@
                       <m:d>
                         <m:dPr>
                           <m:ctrlPr>
-                            <a:rPr lang="pt-BR" i="1">
+                            <a:rPr lang="pt-BR" b="1" i="1">
                               <a:latin typeface="Cambria Math" panose="02040503050406030204" pitchFamily="18" charset="0"/>
+                              <a:ea typeface="Cambria Math" panose="02040503050406030204" pitchFamily="18" charset="0"/>
                             </a:rPr>
                           </m:ctrlPr>
                         </m:dPr>
@@ -28211,7 +28188,7 @@
                           <m:sSup>
                             <m:sSupPr>
                               <m:ctrlPr>
-                                <a:rPr lang="pt-BR" i="1">
+                                <a:rPr lang="pt-BR" i="1" smtClean="0">
                                   <a:latin typeface="Cambria Math" panose="02040503050406030204" pitchFamily="18" charset="0"/>
                                 </a:rPr>
                               </m:ctrlPr>
@@ -28222,7 +28199,7 @@
                                   <m:begChr m:val="["/>
                                   <m:endChr m:val="]"/>
                                   <m:ctrlPr>
-                                    <a:rPr lang="pt-BR" i="1" smtClean="0">
+                                    <a:rPr lang="pt-BR" i="1">
                                       <a:latin typeface="Cambria Math" panose="02040503050406030204" pitchFamily="18" charset="0"/>
                                     </a:rPr>
                                   </m:ctrlPr>
@@ -28286,8 +28263,10 @@
                                       <m:groupChr>
                                         <m:groupChrPr>
                                           <m:chr m:val="⏟"/>
+                                          <m:pos m:val="bot"/>
+                                          <m:vertJc m:val="top"/>
                                           <m:ctrlPr>
-                                            <a:rPr lang="pt-BR" i="1" smtClean="0">
+                                            <a:rPr lang="pt-BR" i="1">
                                               <a:latin typeface="Cambria Math" panose="02040503050406030204" pitchFamily="18" charset="0"/>
                                             </a:rPr>
                                           </m:ctrlPr>
@@ -28778,25 +28757,29 @@
             </a:r>
           </a:p>
           <a:p>
-            <a:r>
-              <a:rPr lang="pt-BR" dirty="0"/>
-              <a:t>Por exemplo, a predição do preço de casas deixa de ser em reais.</a:t>
-            </a:r>
-          </a:p>
-          <a:p>
-            <a:r>
-              <a:rPr lang="pt-BR" dirty="0"/>
-              <a:t>O escalonamento (qualquer tipo) altera os valores dos pesos originais.</a:t>
-            </a:r>
-          </a:p>
-          <a:p>
             <a:pPr lvl="1">
               <a:buFont typeface="Wingdings" panose="05000000000000000000" pitchFamily="2" charset="2"/>
               <a:buChar char="§"/>
             </a:pPr>
             <a:r>
               <a:rPr lang="pt-BR" dirty="0"/>
-              <a:t>Se a escala dos atributos é alterada, para que o modelo ainda prediga os mesmos valores de saída (i.e., rótulos), os pesos precisam ter seus valores alterados (ver anexo I).</a:t>
+              <a:t>Por exemplo, a predição do preço de casas deixa de ser em reais.</a:t>
+            </a:r>
+          </a:p>
+          <a:p>
+            <a:r>
+              <a:rPr lang="pt-BR" dirty="0"/>
+              <a:t>O escalonamento (qualquer tipo) altera os valores dos pesos originais.</a:t>
+            </a:r>
+          </a:p>
+          <a:p>
+            <a:pPr lvl="1">
+              <a:buFont typeface="Wingdings" panose="05000000000000000000" pitchFamily="2" charset="2"/>
+              <a:buChar char="§"/>
+            </a:pPr>
+            <a:r>
+              <a:rPr lang="pt-BR" dirty="0"/>
+              <a:t>Se a escala dos atributos é alterada, para que o modelo gere valores de saída no intervalo original dos rótulos, os pesos precisam ter seus valores alterados (ver anexo I).</a:t>
             </a:r>
           </a:p>
           <a:p>
@@ -28932,11 +28915,11 @@
                     <m:oMathParaPr>
                       <m:jc m:val="center"/>
                     </m:oMathParaPr>
-                    <m:oMath xmlns:m="http://schemas.openxmlformats.org/officeDocument/2006/math">
+                    <m:oMath>
                       <m:sSub>
                         <m:sSubPr>
                           <m:ctrlPr>
-                            <a:rPr lang="en-US" i="1">
+                            <a:rPr lang="pt-BR" i="1">
                               <a:latin typeface="Cambria Math" panose="02040503050406030204" pitchFamily="18" charset="0"/>
                             </a:rPr>
                           </m:ctrlPr>
@@ -28945,7 +28928,7 @@
                           <m:sSup>
                             <m:sSupPr>
                               <m:ctrlPr>
-                                <a:rPr lang="pt-BR" i="1">
+                                <a:rPr lang="en-US" i="1">
                                   <a:latin typeface="Cambria Math" panose="02040503050406030204" pitchFamily="18" charset="0"/>
                                 </a:rPr>
                               </m:ctrlPr>
@@ -28980,7 +28963,7 @@
                       <m:d>
                         <m:dPr>
                           <m:ctrlPr>
-                            <a:rPr lang="pt-BR" i="1">
+                            <a:rPr lang="pt-BR" b="0" i="1" smtClean="0">
                               <a:latin typeface="Cambria Math" panose="02040503050406030204" pitchFamily="18" charset="0"/>
                             </a:rPr>
                           </m:ctrlPr>
@@ -29037,7 +29020,7 @@
                           <m:d>
                             <m:dPr>
                               <m:ctrlPr>
-                                <a:rPr lang="pt-BR" i="1">
+                                <a:rPr lang="pt-BR" b="0" i="1" smtClean="0">
                                   <a:latin typeface="Cambria Math" panose="02040503050406030204" pitchFamily="18" charset="0"/>
                                 </a:rPr>
                               </m:ctrlPr>
@@ -29078,7 +29061,7 @@
                               <m:sSub>
                                 <m:sSubPr>
                                   <m:ctrlPr>
-                                    <a:rPr lang="en-US" i="1">
+                                    <a:rPr lang="en-US" b="1" i="1">
                                       <a:latin typeface="Cambria Math" panose="02040503050406030204" pitchFamily="18" charset="0"/>
                                     </a:rPr>
                                   </m:ctrlPr>
@@ -29125,7 +29108,7 @@
                               <m:sSub>
                                 <m:sSubPr>
                                   <m:ctrlPr>
-                                    <a:rPr lang="en-US" i="1">
+                                    <a:rPr lang="en-US" b="1" i="1">
                                       <a:latin typeface="Cambria Math" panose="02040503050406030204" pitchFamily="18" charset="0"/>
                                     </a:rPr>
                                   </m:ctrlPr>
@@ -29176,7 +29159,7 @@
                               <m:sSub>
                                 <m:sSubPr>
                                   <m:ctrlPr>
-                                    <a:rPr lang="en-US" i="1">
+                                    <a:rPr lang="en-US" b="1" i="1">
                                       <a:latin typeface="Cambria Math" panose="02040503050406030204" pitchFamily="18" charset="0"/>
                                     </a:rPr>
                                   </m:ctrlPr>
@@ -29211,7 +29194,7 @@
                       <m:sSub>
                         <m:sSubPr>
                           <m:ctrlPr>
-                            <a:rPr lang="en-US" i="1">
+                            <a:rPr lang="pt-BR" i="1">
                               <a:latin typeface="Cambria Math" panose="02040503050406030204" pitchFamily="18" charset="0"/>
                             </a:rPr>
                           </m:ctrlPr>
@@ -29233,7 +29216,7 @@
                           <m:sSup>
                             <m:sSupPr>
                               <m:ctrlPr>
-                                <a:rPr lang="pt-BR" i="1">
+                                <a:rPr lang="en-US" i="1">
                                   <a:latin typeface="Cambria Math" panose="02040503050406030204" pitchFamily="18" charset="0"/>
                                 </a:rPr>
                               </m:ctrlPr>
@@ -29268,7 +29251,7 @@
                       <m:d>
                         <m:dPr>
                           <m:ctrlPr>
-                            <a:rPr lang="pt-BR" i="1">
+                            <a:rPr lang="pt-BR" b="0" i="1" smtClean="0">
                               <a:latin typeface="Cambria Math" panose="02040503050406030204" pitchFamily="18" charset="0"/>
                             </a:rPr>
                           </m:ctrlPr>
@@ -29316,7 +29299,7 @@
                     <m:sSub>
                       <m:sSubPr>
                         <m:ctrlPr>
-                          <a:rPr lang="en-US" i="1" smtClean="0">
+                          <a:rPr lang="en-US" i="1">
                             <a:latin typeface="Cambria Math" panose="02040503050406030204" pitchFamily="18" charset="0"/>
                           </a:rPr>
                         </m:ctrlPr>
@@ -29401,7 +29384,7 @@
                         <m:sSub>
                           <m:sSubPr>
                             <m:ctrlPr>
-                              <a:rPr lang="en-US" i="1">
+                              <a:rPr lang="en-US" b="1" i="1">
                                 <a:latin typeface="Cambria Math" panose="02040503050406030204" pitchFamily="18" charset="0"/>
                               </a:rPr>
                             </m:ctrlPr>
@@ -29454,7 +29437,7 @@
                         <m:sSub>
                           <m:sSubPr>
                             <m:ctrlPr>
-                              <a:rPr lang="en-US" i="1">
+                              <a:rPr lang="en-US" b="1" i="1">
                                 <a:latin typeface="Cambria Math" panose="02040503050406030204" pitchFamily="18" charset="0"/>
                               </a:rPr>
                             </m:ctrlPr>
@@ -29522,7 +29505,7 @@
                     <m:sSub>
                       <m:sSubPr>
                         <m:ctrlPr>
-                          <a:rPr lang="en-US" i="1">
+                          <a:rPr lang="en-US" b="1" i="1">
                             <a:latin typeface="Cambria Math" panose="02040503050406030204" pitchFamily="18" charset="0"/>
                           </a:rPr>
                         </m:ctrlPr>
@@ -30128,6 +30111,15 @@
 </file>
 
 <file path=customXml/item1.xml><?xml version="1.0" encoding="utf-8"?>
+<?mso-contentType ?>
+<FormTemplates xmlns="http://schemas.microsoft.com/sharepoint/v3/contenttype/forms">
+  <Display>DocumentLibraryForm</Display>
+  <Edit>DocumentLibraryForm</Edit>
+  <New>DocumentLibraryForm</New>
+</FormTemplates>
+</file>
+
+<file path=customXml/item2.xml><?xml version="1.0" encoding="utf-8"?>
 <ct:contentTypeSchema xmlns:ct="http://schemas.microsoft.com/office/2006/metadata/contentType" xmlns:ma="http://schemas.microsoft.com/office/2006/metadata/properties/metaAttributes" ct:_="" ma:_="" ma:contentTypeName="Document" ma:contentTypeID="0x010100A6553FE09A98904B92A9D00A38127206" ma:contentTypeVersion="18" ma:contentTypeDescription="Create a new document." ma:contentTypeScope="" ma:versionID="92863cfdd2d5fd2ee9b6f30d8c51b1f5">
   <xsd:schema xmlns:xsd="http://www.w3.org/2001/XMLSchema" xmlns:xs="http://www.w3.org/2001/XMLSchema" xmlns:p="http://schemas.microsoft.com/office/2006/metadata/properties" xmlns:ns3="10322600-47b9-44f6-86ef-c87c87ba6e82" xmlns:ns4="026c264a-64f6-48aa-bde0-8bf9e5064f89" targetNamespace="http://schemas.microsoft.com/office/2006/metadata/properties" ma:root="true" ma:fieldsID="86148dd4b4cd32a5258cd233a95bdcf5" ns3:_="" ns4:_="">
     <xsd:import namespace="10322600-47b9-44f6-86ef-c87c87ba6e82"/>
@@ -30380,15 +30372,6 @@
 </ct:contentTypeSchema>
 </file>
 
-<file path=customXml/item2.xml><?xml version="1.0" encoding="utf-8"?>
-<?mso-contentType ?>
-<FormTemplates xmlns="http://schemas.microsoft.com/sharepoint/v3/contenttype/forms">
-  <Display>DocumentLibraryForm</Display>
-  <Edit>DocumentLibraryForm</Edit>
-  <New>DocumentLibraryForm</New>
-</FormTemplates>
-</file>
-
 <file path=customXml/item3.xml><?xml version="1.0" encoding="utf-8"?>
 <p:properties xmlns:p="http://schemas.microsoft.com/office/2006/metadata/properties" xmlns:xsi="http://www.w3.org/2001/XMLSchema-instance" xmlns:pc="http://schemas.microsoft.com/office/infopath/2007/PartnerControls">
   <documentManagement>
@@ -30398,6 +30381,14 @@
 </file>
 
 <file path=customXml/itemProps1.xml><?xml version="1.0" encoding="utf-8"?>
+<ds:datastoreItem xmlns:ds="http://schemas.openxmlformats.org/officeDocument/2006/customXml" ds:itemID="{D67F36EB-496F-4262-A9FD-0843EF3B6D81}">
+  <ds:schemaRefs>
+    <ds:schemaRef ds:uri="http://schemas.microsoft.com/sharepoint/v3/contenttype/forms"/>
+  </ds:schemaRefs>
+</ds:datastoreItem>
+</file>
+
+<file path=customXml/itemProps2.xml><?xml version="1.0" encoding="utf-8"?>
 <ds:datastoreItem xmlns:ds="http://schemas.openxmlformats.org/officeDocument/2006/customXml" ds:itemID="{43BF8E7A-7F85-4B5C-91EE-1390147153F1}">
   <ds:schemaRefs>
     <ds:schemaRef ds:uri="http://schemas.microsoft.com/office/2006/metadata/contentType"/>
@@ -30416,14 +30407,6 @@
 </ds:datastoreItem>
 </file>
 
-<file path=customXml/itemProps2.xml><?xml version="1.0" encoding="utf-8"?>
-<ds:datastoreItem xmlns:ds="http://schemas.openxmlformats.org/officeDocument/2006/customXml" ds:itemID="{D67F36EB-496F-4262-A9FD-0843EF3B6D81}">
-  <ds:schemaRefs>
-    <ds:schemaRef ds:uri="http://schemas.microsoft.com/sharepoint/v3/contenttype/forms"/>
-  </ds:schemaRefs>
-</ds:datastoreItem>
-</file>
-
 <file path=customXml/itemProps3.xml><?xml version="1.0" encoding="utf-8"?>
 <ds:datastoreItem xmlns:ds="http://schemas.openxmlformats.org/officeDocument/2006/customXml" ds:itemID="{0377E4F8-F73A-4838-818D-26069B242819}">
   <ds:schemaRefs>

--- a/slides/T319_Regressão_Linear (Parte IV).pptx
+++ b/slides/T319_Regressão_Linear (Parte IV).pptx
@@ -9196,7 +9196,10 @@
                 </a:pPr>
                 <a14:m>
                   <m:oMathPara xmlns:m="http://schemas.openxmlformats.org/officeDocument/2006/math">
-                    <m:oMath>
+                    <m:oMathParaPr>
+                      <m:jc m:val="centerGroup"/>
+                    </m:oMathParaPr>
+                    <m:oMath xmlns:m="http://schemas.openxmlformats.org/officeDocument/2006/math">
                       <m:sSub>
                         <m:sSubPr>
                           <m:ctrlPr>
@@ -12008,7 +12011,10 @@
                 </a:pPr>
                 <a14:m>
                   <m:oMathPara xmlns:m="http://schemas.openxmlformats.org/officeDocument/2006/math">
-                    <m:oMath>
+                    <m:oMathParaPr>
+                      <m:jc m:val="centerGroup"/>
+                    </m:oMathParaPr>
+                    <m:oMath xmlns:m="http://schemas.openxmlformats.org/officeDocument/2006/math">
                       <m:sSub>
                         <m:sSubPr>
                           <m:ctrlPr>
@@ -13281,12 +13287,15 @@
                 </a:pPr>
                 <a14:m>
                   <m:oMathPara xmlns:m="http://schemas.openxmlformats.org/officeDocument/2006/math">
-                    <m:oMath>
+                    <m:oMathParaPr>
+                      <m:jc m:val="centerGroup"/>
+                    </m:oMathParaPr>
+                    <m:oMath xmlns:m="http://schemas.openxmlformats.org/officeDocument/2006/math">
                       <m:r>
                         <a:rPr lang="pt-BR" i="1">
                           <a:latin typeface="Cambria Math" panose="02040503050406030204" pitchFamily="18" charset="0"/>
                         </a:rPr>
-                        <m:t>ℎ</m:t>
+                        <m:t>h</m:t>
                       </m:r>
                       <m:d>
                         <m:dPr>
@@ -14617,12 +14626,15 @@
                 </a:pPr>
                 <a14:m>
                   <m:oMathPara xmlns:m="http://schemas.openxmlformats.org/officeDocument/2006/math">
-                    <m:oMath>
+                    <m:oMathParaPr>
+                      <m:jc m:val="centerGroup"/>
+                    </m:oMathParaPr>
+                    <m:oMath xmlns:m="http://schemas.openxmlformats.org/officeDocument/2006/math">
                       <m:r>
                         <a:rPr lang="pt-BR" i="1" smtClean="0">
                           <a:latin typeface="Cambria Math" panose="02040503050406030204" pitchFamily="18" charset="0"/>
                         </a:rPr>
-                        <m:t>ℎ</m:t>
+                        <m:t>h</m:t>
                       </m:r>
                       <m:d>
                         <m:dPr>
@@ -15018,7 +15030,10 @@
                 </a:pPr>
                 <a14:m>
                   <m:oMathPara xmlns:m="http://schemas.openxmlformats.org/officeDocument/2006/math">
-                    <m:oMath>
+                    <m:oMathParaPr>
+                      <m:jc m:val="centerGroup"/>
+                    </m:oMathParaPr>
+                    <m:oMath xmlns:m="http://schemas.openxmlformats.org/officeDocument/2006/math">
                       <m:r>
                         <a:rPr lang="pt-BR" b="1" i="1" smtClean="0">
                           <a:latin typeface="Cambria Math" panose="02040503050406030204" pitchFamily="18" charset="0"/>
@@ -16659,7 +16674,7 @@
                     <m:d>
                       <m:dPr>
                         <m:ctrlPr>
-                          <a:rPr lang="pt-BR">
+                          <a:rPr lang="pt-BR" i="1">
                             <a:latin typeface="Cambria Math" panose="02040503050406030204" pitchFamily="18" charset="0"/>
                             <a:ea typeface="Cambria Math" panose="02040503050406030204" pitchFamily="18" charset="0"/>
                           </a:rPr>
@@ -18828,7 +18843,7 @@
               <a:p>
                 <a:r>
                   <a:rPr lang="pt-BR" dirty="0"/>
-                  <a:t>Por exemplo, se </a:t>
+                  <a:t>Por exemplo, na função hipótese abaixo, se </a:t>
                 </a:r>
                 <a14:m>
                   <m:oMath xmlns:m="http://schemas.openxmlformats.org/officeDocument/2006/math">
@@ -18957,7 +18972,7 @@
               <a:lstStyle/>
               <a:p>
                 <a:r>
-                  <a:rPr lang="en-US">
+                  <a:rPr lang="pt-BR">
                     <a:noFill/>
                   </a:rPr>
                   <a:t> </a:t>
@@ -19003,7 +19018,7 @@
                     <m:oMathParaPr>
                       <m:jc m:val="center"/>
                     </m:oMathParaPr>
-                    <m:oMath>
+                    <m:oMath xmlns:m="http://schemas.openxmlformats.org/officeDocument/2006/math">
                       <m:sSub>
                         <m:sSubPr>
                           <m:ctrlPr>
@@ -19195,8 +19210,6 @@
                                       <m:groupChr>
                                         <m:groupChrPr>
                                           <m:chr m:val="⏟"/>
-                                          <m:pos m:val="bot"/>
-                                          <m:vertJc m:val="top"/>
                                           <m:ctrlPr>
                                             <a:rPr lang="pt-BR" sz="2400" i="1">
                                               <a:latin typeface="Cambria Math" panose="02040503050406030204" pitchFamily="18" charset="0"/>
@@ -19786,7 +19799,10 @@
                 <a:pPr/>
                 <a14:m>
                   <m:oMathPara xmlns:m="http://schemas.openxmlformats.org/officeDocument/2006/math">
-                    <m:oMath>
+                    <m:oMathParaPr>
+                      <m:jc m:val="centerGroup"/>
+                    </m:oMathParaPr>
+                    <m:oMath xmlns:m="http://schemas.openxmlformats.org/officeDocument/2006/math">
                       <m:sSub>
                         <m:sSubPr>
                           <m:ctrlPr>
@@ -20667,7 +20683,10 @@
                 </a:pPr>
                 <a14:m>
                   <m:oMathPara xmlns:m="http://schemas.openxmlformats.org/officeDocument/2006/math">
-                    <m:oMath>
+                    <m:oMathParaPr>
+                      <m:jc m:val="centerGroup"/>
+                    </m:oMathParaPr>
+                    <m:oMath xmlns:m="http://schemas.openxmlformats.org/officeDocument/2006/math">
                       <m:acc>
                         <m:accPr>
                           <m:chr m:val="̂"/>
@@ -20836,7 +20855,10 @@
                 </a:pPr>
                 <a14:m>
                   <m:oMathPara xmlns:m="http://schemas.openxmlformats.org/officeDocument/2006/math">
-                    <m:oMath>
+                    <m:oMathParaPr>
+                      <m:jc m:val="centerGroup"/>
+                    </m:oMathParaPr>
+                    <m:oMath xmlns:m="http://schemas.openxmlformats.org/officeDocument/2006/math">
                       <m:sSub>
                         <m:sSubPr>
                           <m:ctrlPr>
@@ -21356,7 +21378,10 @@
                 </a:pPr>
                 <a14:m>
                   <m:oMathPara xmlns:m="http://schemas.openxmlformats.org/officeDocument/2006/math">
-                    <m:oMath>
+                    <m:oMathParaPr>
+                      <m:jc m:val="centerGroup"/>
+                    </m:oMathParaPr>
+                    <m:oMath xmlns:m="http://schemas.openxmlformats.org/officeDocument/2006/math">
                       <m:sSub>
                         <m:sSubPr>
                           <m:ctrlPr>
@@ -21628,7 +21653,10 @@
                 </a:pPr>
                 <a14:m>
                   <m:oMathPara xmlns:m="http://schemas.openxmlformats.org/officeDocument/2006/math">
-                    <m:oMath>
+                    <m:oMathParaPr>
+                      <m:jc m:val="centerGroup"/>
+                    </m:oMathParaPr>
+                    <m:oMath xmlns:m="http://schemas.openxmlformats.org/officeDocument/2006/math">
                       <m:acc>
                         <m:accPr>
                           <m:chr m:val="̂"/>
@@ -22438,7 +22466,10 @@
                 </a:pPr>
                 <a14:m>
                   <m:oMathPara xmlns:m="http://schemas.openxmlformats.org/officeDocument/2006/math">
-                    <m:oMath>
+                    <m:oMathParaPr>
+                      <m:jc m:val="centerGroup"/>
+                    </m:oMathParaPr>
+                    <m:oMath xmlns:m="http://schemas.openxmlformats.org/officeDocument/2006/math">
                       <m:acc>
                         <m:accPr>
                           <m:chr m:val="̂"/>
@@ -24155,7 +24186,10 @@
                   <a:pPr/>
                   <a14:m>
                     <m:oMathPara xmlns:m="http://schemas.openxmlformats.org/officeDocument/2006/math">
-                      <m:oMath>
+                      <m:oMathParaPr>
+                        <m:jc m:val="centerGroup"/>
+                      </m:oMathParaPr>
+                      <m:oMath xmlns:m="http://schemas.openxmlformats.org/officeDocument/2006/math">
                         <m:sSub>
                           <m:sSubPr>
                             <m:ctrlPr>
@@ -24255,7 +24289,10 @@
                   <a:pPr/>
                   <a14:m>
                     <m:oMathPara xmlns:m="http://schemas.openxmlformats.org/officeDocument/2006/math">
-                      <m:oMath>
+                      <m:oMathParaPr>
+                        <m:jc m:val="centerGroup"/>
+                      </m:oMathParaPr>
+                      <m:oMath xmlns:m="http://schemas.openxmlformats.org/officeDocument/2006/math">
                         <m:sSub>
                           <m:sSubPr>
                             <m:ctrlPr>
@@ -24838,7 +24875,10 @@
                   <a:pPr/>
                   <a14:m>
                     <m:oMathPara xmlns:m="http://schemas.openxmlformats.org/officeDocument/2006/math">
-                      <m:oMath>
+                      <m:oMathParaPr>
+                        <m:jc m:val="centerGroup"/>
+                      </m:oMathParaPr>
+                      <m:oMath xmlns:m="http://schemas.openxmlformats.org/officeDocument/2006/math">
                         <m:sSub>
                           <m:sSubPr>
                             <m:ctrlPr>
@@ -24938,7 +24978,10 @@
                   <a:pPr/>
                   <a14:m>
                     <m:oMathPara xmlns:m="http://schemas.openxmlformats.org/officeDocument/2006/math">
-                      <m:oMath>
+                      <m:oMathParaPr>
+                        <m:jc m:val="centerGroup"/>
+                      </m:oMathParaPr>
+                      <m:oMath xmlns:m="http://schemas.openxmlformats.org/officeDocument/2006/math">
                         <m:sSub>
                           <m:sSubPr>
                             <m:ctrlPr>
@@ -26833,8 +26876,8 @@
           </a:p>
         </p:txBody>
       </p:sp>
-      <mc:AlternateContent xmlns:mc="http://schemas.openxmlformats.org/markup-compatibility/2006">
-        <mc:Choice xmlns:a14="http://schemas.microsoft.com/office/drawing/2010/main" Requires="a14">
+      <mc:AlternateContent xmlns:mc="http://schemas.openxmlformats.org/markup-compatibility/2006" xmlns:a14="http://schemas.microsoft.com/office/drawing/2010/main">
+        <mc:Choice Requires="a14">
           <p:sp>
             <p:nvSpPr>
               <p:cNvPr id="3" name="Espaço Reservado para Conteúdo 2">
@@ -27006,7 +27049,7 @@
             </p:txBody>
           </p:sp>
         </mc:Choice>
-        <mc:Fallback>
+        <mc:Fallback xmlns="">
           <p:sp>
             <p:nvSpPr>
               <p:cNvPr id="3" name="Espaço Reservado para Conteúdo 2">
@@ -27292,8 +27335,8 @@
           </a:p>
         </p:txBody>
       </p:sp>
-      <mc:AlternateContent xmlns:mc="http://schemas.openxmlformats.org/markup-compatibility/2006">
-        <mc:Choice xmlns:a14="http://schemas.microsoft.com/office/drawing/2010/main" Requires="a14">
+      <mc:AlternateContent xmlns:mc="http://schemas.openxmlformats.org/markup-compatibility/2006" xmlns:a14="http://schemas.microsoft.com/office/drawing/2010/main">
+        <mc:Choice Requires="a14">
           <p:sp>
             <p:nvSpPr>
               <p:cNvPr id="3" name="Espaço Reservado para Conteúdo 2">
@@ -27451,7 +27494,10 @@
                 </a:pPr>
                 <a14:m>
                   <m:oMathPara xmlns:m="http://schemas.openxmlformats.org/officeDocument/2006/math">
-                    <m:oMath>
+                    <m:oMathParaPr>
+                      <m:jc m:val="centerGroup"/>
+                    </m:oMathParaPr>
+                    <m:oMath xmlns:m="http://schemas.openxmlformats.org/officeDocument/2006/math">
                       <m:sSub>
                         <m:sSubPr>
                           <m:ctrlPr>
@@ -27646,7 +27692,7 @@
             </p:txBody>
           </p:sp>
         </mc:Choice>
-        <mc:Fallback>
+        <mc:Fallback xmlns="">
           <p:sp>
             <p:nvSpPr>
               <p:cNvPr id="3" name="Espaço Reservado para Conteúdo 2">
@@ -28071,7 +28117,10 @@
                 </a:pPr>
                 <a14:m>
                   <m:oMathPara xmlns:m="http://schemas.openxmlformats.org/officeDocument/2006/math">
-                    <m:oMath>
+                    <m:oMathParaPr>
+                      <m:jc m:val="centerGroup"/>
+                    </m:oMathParaPr>
+                    <m:oMath xmlns:m="http://schemas.openxmlformats.org/officeDocument/2006/math">
                       <m:sSub>
                         <m:sSubPr>
                           <m:ctrlPr>
@@ -28263,8 +28312,6 @@
                                       <m:groupChr>
                                         <m:groupChrPr>
                                           <m:chr m:val="⏟"/>
-                                          <m:pos m:val="bot"/>
-                                          <m:vertJc m:val="top"/>
                                           <m:ctrlPr>
                                             <a:rPr lang="pt-BR" i="1">
                                               <a:latin typeface="Cambria Math" panose="02040503050406030204" pitchFamily="18" charset="0"/>
@@ -28915,7 +28962,7 @@
                     <m:oMathParaPr>
                       <m:jc m:val="center"/>
                     </m:oMathParaPr>
-                    <m:oMath>
+                    <m:oMath xmlns:m="http://schemas.openxmlformats.org/officeDocument/2006/math">
                       <m:sSub>
                         <m:sSubPr>
                           <m:ctrlPr>
@@ -30111,15 +30158,6 @@
 </file>
 
 <file path=customXml/item1.xml><?xml version="1.0" encoding="utf-8"?>
-<?mso-contentType ?>
-<FormTemplates xmlns="http://schemas.microsoft.com/sharepoint/v3/contenttype/forms">
-  <Display>DocumentLibraryForm</Display>
-  <Edit>DocumentLibraryForm</Edit>
-  <New>DocumentLibraryForm</New>
-</FormTemplates>
-</file>
-
-<file path=customXml/item2.xml><?xml version="1.0" encoding="utf-8"?>
 <ct:contentTypeSchema xmlns:ct="http://schemas.microsoft.com/office/2006/metadata/contentType" xmlns:ma="http://schemas.microsoft.com/office/2006/metadata/properties/metaAttributes" ct:_="" ma:_="" ma:contentTypeName="Document" ma:contentTypeID="0x010100A6553FE09A98904B92A9D00A38127206" ma:contentTypeVersion="18" ma:contentTypeDescription="Create a new document." ma:contentTypeScope="" ma:versionID="92863cfdd2d5fd2ee9b6f30d8c51b1f5">
   <xsd:schema xmlns:xsd="http://www.w3.org/2001/XMLSchema" xmlns:xs="http://www.w3.org/2001/XMLSchema" xmlns:p="http://schemas.microsoft.com/office/2006/metadata/properties" xmlns:ns3="10322600-47b9-44f6-86ef-c87c87ba6e82" xmlns:ns4="026c264a-64f6-48aa-bde0-8bf9e5064f89" targetNamespace="http://schemas.microsoft.com/office/2006/metadata/properties" ma:root="true" ma:fieldsID="86148dd4b4cd32a5258cd233a95bdcf5" ns3:_="" ns4:_="">
     <xsd:import namespace="10322600-47b9-44f6-86ef-c87c87ba6e82"/>
@@ -30372,6 +30410,15 @@
 </ct:contentTypeSchema>
 </file>
 
+<file path=customXml/item2.xml><?xml version="1.0" encoding="utf-8"?>
+<?mso-contentType ?>
+<FormTemplates xmlns="http://schemas.microsoft.com/sharepoint/v3/contenttype/forms">
+  <Display>DocumentLibraryForm</Display>
+  <Edit>DocumentLibraryForm</Edit>
+  <New>DocumentLibraryForm</New>
+</FormTemplates>
+</file>
+
 <file path=customXml/item3.xml><?xml version="1.0" encoding="utf-8"?>
 <p:properties xmlns:p="http://schemas.microsoft.com/office/2006/metadata/properties" xmlns:xsi="http://www.w3.org/2001/XMLSchema-instance" xmlns:pc="http://schemas.microsoft.com/office/infopath/2007/PartnerControls">
   <documentManagement>
@@ -30381,14 +30428,6 @@
 </file>
 
 <file path=customXml/itemProps1.xml><?xml version="1.0" encoding="utf-8"?>
-<ds:datastoreItem xmlns:ds="http://schemas.openxmlformats.org/officeDocument/2006/customXml" ds:itemID="{D67F36EB-496F-4262-A9FD-0843EF3B6D81}">
-  <ds:schemaRefs>
-    <ds:schemaRef ds:uri="http://schemas.microsoft.com/sharepoint/v3/contenttype/forms"/>
-  </ds:schemaRefs>
-</ds:datastoreItem>
-</file>
-
-<file path=customXml/itemProps2.xml><?xml version="1.0" encoding="utf-8"?>
 <ds:datastoreItem xmlns:ds="http://schemas.openxmlformats.org/officeDocument/2006/customXml" ds:itemID="{43BF8E7A-7F85-4B5C-91EE-1390147153F1}">
   <ds:schemaRefs>
     <ds:schemaRef ds:uri="http://schemas.microsoft.com/office/2006/metadata/contentType"/>
@@ -30407,6 +30446,14 @@
 </ds:datastoreItem>
 </file>
 
+<file path=customXml/itemProps2.xml><?xml version="1.0" encoding="utf-8"?>
+<ds:datastoreItem xmlns:ds="http://schemas.openxmlformats.org/officeDocument/2006/customXml" ds:itemID="{D67F36EB-496F-4262-A9FD-0843EF3B6D81}">
+  <ds:schemaRefs>
+    <ds:schemaRef ds:uri="http://schemas.microsoft.com/sharepoint/v3/contenttype/forms"/>
+  </ds:schemaRefs>
+</ds:datastoreItem>
+</file>
+
 <file path=customXml/itemProps3.xml><?xml version="1.0" encoding="utf-8"?>
 <ds:datastoreItem xmlns:ds="http://schemas.openxmlformats.org/officeDocument/2006/customXml" ds:itemID="{0377E4F8-F73A-4838-818D-26069B242819}">
   <ds:schemaRefs>

--- a/slides/T319_Regressão_Linear (Parte IV).pptx
+++ b/slides/T319_Regressão_Linear (Parte IV).pptx
@@ -235,7 +235,7 @@
           <a:p>
             <a:fld id="{DAF0AF11-6A8A-4E64-94F5-26D4FBA2A01D}" type="datetimeFigureOut">
               <a:rPr lang="nl-BE" smtClean="0"/>
-              <a:t>9/10/2026</a:t>
+              <a:t>23/10/2026</a:t>
             </a:fld>
             <a:endParaRPr lang="nl-BE"/>
           </a:p>
@@ -1460,6 +1460,168 @@
           <a:lstStyle/>
           <a:p>
             <a:r>
+              <a:rPr lang="en-US" dirty="0"/>
+              <a:t>Um </a:t>
+            </a:r>
+            <a:r>
+              <a:rPr lang="en-US" b="1" dirty="0" err="1"/>
+              <a:t>monômio</a:t>
+            </a:r>
+            <a:r>
+              <a:rPr lang="en-US" dirty="0"/>
+              <a:t> é </a:t>
+            </a:r>
+            <a:r>
+              <a:rPr lang="en-US" dirty="0" err="1"/>
+              <a:t>cada</a:t>
+            </a:r>
+            <a:r>
+              <a:rPr lang="en-US" dirty="0"/>
+              <a:t> </a:t>
+            </a:r>
+            <a:r>
+              <a:rPr lang="en-US" dirty="0" err="1"/>
+              <a:t>termo</a:t>
+            </a:r>
+            <a:r>
+              <a:rPr lang="en-US" dirty="0"/>
+              <a:t> individual de um </a:t>
+            </a:r>
+            <a:r>
+              <a:rPr lang="en-US" dirty="0" err="1"/>
+              <a:t>polinômio</a:t>
+            </a:r>
+            <a:r>
+              <a:rPr lang="en-US" dirty="0"/>
+              <a:t>: o </a:t>
+            </a:r>
+            <a:r>
+              <a:rPr lang="en-US" dirty="0" err="1"/>
+              <a:t>produto</a:t>
+            </a:r>
+            <a:r>
+              <a:rPr lang="en-US" dirty="0"/>
+              <a:t> de um </a:t>
+            </a:r>
+            <a:r>
+              <a:rPr lang="en-US" dirty="0" err="1"/>
+              <a:t>coeficiente</a:t>
+            </a:r>
+            <a:r>
+              <a:rPr lang="en-US" dirty="0"/>
+              <a:t> (</a:t>
+            </a:r>
+            <a:r>
+              <a:rPr lang="en-US" dirty="0" err="1"/>
+              <a:t>número</a:t>
+            </a:r>
+            <a:r>
+              <a:rPr lang="en-US" dirty="0"/>
+              <a:t>) </a:t>
+            </a:r>
+            <a:r>
+              <a:rPr lang="en-US" dirty="0" err="1"/>
+              <a:t>por</a:t>
+            </a:r>
+            <a:r>
+              <a:rPr lang="en-US" dirty="0"/>
+              <a:t> </a:t>
+            </a:r>
+            <a:r>
+              <a:rPr lang="en-US" dirty="0" err="1"/>
+              <a:t>uma</a:t>
+            </a:r>
+            <a:r>
+              <a:rPr lang="en-US" dirty="0"/>
+              <a:t> </a:t>
+            </a:r>
+            <a:r>
+              <a:rPr lang="en-US" dirty="0" err="1"/>
+              <a:t>ou</a:t>
+            </a:r>
+            <a:r>
+              <a:rPr lang="en-US" dirty="0"/>
+              <a:t> </a:t>
+            </a:r>
+            <a:r>
+              <a:rPr lang="en-US" dirty="0" err="1"/>
+              <a:t>mais</a:t>
+            </a:r>
+            <a:r>
+              <a:rPr lang="en-US" dirty="0"/>
+              <a:t> </a:t>
+            </a:r>
+            <a:r>
+              <a:rPr lang="en-US" dirty="0" err="1"/>
+              <a:t>variáveis</a:t>
+            </a:r>
+            <a:r>
+              <a:rPr lang="en-US" dirty="0"/>
+              <a:t> </a:t>
+            </a:r>
+            <a:r>
+              <a:rPr lang="en-US" dirty="0" err="1"/>
+              <a:t>elevadas</a:t>
+            </a:r>
+            <a:r>
+              <a:rPr lang="en-US" dirty="0"/>
+              <a:t> a </a:t>
+            </a:r>
+            <a:r>
+              <a:rPr lang="en-US" dirty="0" err="1"/>
+              <a:t>expoentes</a:t>
+            </a:r>
+            <a:r>
+              <a:rPr lang="en-US" dirty="0"/>
+              <a:t> </a:t>
+            </a:r>
+            <a:r>
+              <a:rPr lang="en-US" dirty="0" err="1"/>
+              <a:t>inteiros</a:t>
+            </a:r>
+            <a:r>
+              <a:rPr lang="en-US" dirty="0"/>
+              <a:t> </a:t>
+            </a:r>
+            <a:r>
+              <a:rPr lang="en-US" dirty="0" err="1"/>
+              <a:t>não</a:t>
+            </a:r>
+            <a:r>
+              <a:rPr lang="en-US" dirty="0"/>
+              <a:t> </a:t>
+            </a:r>
+            <a:r>
+              <a:rPr lang="en-US" dirty="0" err="1"/>
+              <a:t>negativos</a:t>
+            </a:r>
+            <a:r>
+              <a:rPr lang="en-US" dirty="0"/>
+              <a:t>.</a:t>
+            </a:r>
+            <a:endParaRPr lang="en-US" sz="1200" b="0" i="0" kern="1200" dirty="0">
+              <a:solidFill>
+                <a:schemeClr val="tx1"/>
+              </a:solidFill>
+              <a:effectLst/>
+              <a:latin typeface="+mn-lt"/>
+              <a:ea typeface="+mn-ea"/>
+              <a:cs typeface="+mn-cs"/>
+            </a:endParaRPr>
+          </a:p>
+          <a:p>
+            <a:endParaRPr lang="en-US" sz="1200" b="0" i="0" kern="1200" dirty="0">
+              <a:solidFill>
+                <a:schemeClr val="tx1"/>
+              </a:solidFill>
+              <a:effectLst/>
+              <a:latin typeface="+mn-lt"/>
+              <a:ea typeface="+mn-ea"/>
+              <a:cs typeface="+mn-cs"/>
+            </a:endParaRPr>
+          </a:p>
+          <a:p>
+            <a:r>
               <a:rPr lang="en-US" sz="1200" b="0" i="0" kern="1200" dirty="0">
                 <a:solidFill>
                   <a:schemeClr val="tx1"/>
@@ -5833,7 +5995,7 @@
           <a:p>
             <a:r>
               <a:rPr lang="pt-BR" dirty="0"/>
-              <a:t>1. **Melhor convergência:** O escalonamento de atributos pode ajudar algoritmos de otimização, como o gradiente descendente, a convergir mais rapidamente. Quando os atributos estão em escalas semelhantes, o algoritmo pode encontrar o mínimo global da função de erro de forma mais eficiente.</a:t>
+              <a:t>1. Melhor convergência: O escalonamento de atributos pode ajudar algoritmos de otimização, como o gradiente descendente, a convergir mais rapidamente. Quando os atributos estão em escalas semelhantes, o algoritmo pode encontrar o mínimo global da função de erro de forma mais eficiente.</a:t>
             </a:r>
           </a:p>
           <a:p>
@@ -5842,7 +6004,7 @@
           <a:p>
             <a:r>
               <a:rPr lang="pt-BR" dirty="0"/>
-              <a:t>2. **Prevenção de domínio:** Evita que atributos com escalas muito diferentes dominem o processo de treinamento. Sem escalonamento, atributos com escalas maiores podem ter um impacto desproporcional no modelo, levando a um viés indesejado.</a:t>
+              <a:t>2. Prevenção de domínio: Evita que atributos com escalas muito diferentes dominem o processo de treinamento. Sem escalonamento, atributos com escalas maiores podem ter um impacto desproporcional no modelo, levando a um viés indesejado.</a:t>
             </a:r>
           </a:p>
           <a:p>
@@ -6140,7 +6302,7 @@
           <a:p>
             <a:fld id="{C80E15A5-E95B-43EB-9AC7-9A96397448C0}" type="datetimeFigureOut">
               <a:rPr lang="nl-BE" smtClean="0"/>
-              <a:t>9/10/2026</a:t>
+              <a:t>23/10/2026</a:t>
             </a:fld>
             <a:endParaRPr lang="nl-BE"/>
           </a:p>
@@ -6310,7 +6472,7 @@
           <a:p>
             <a:fld id="{C80E15A5-E95B-43EB-9AC7-9A96397448C0}" type="datetimeFigureOut">
               <a:rPr lang="nl-BE" smtClean="0"/>
-              <a:t>9/10/2026</a:t>
+              <a:t>23/10/2026</a:t>
             </a:fld>
             <a:endParaRPr lang="nl-BE"/>
           </a:p>
@@ -6490,7 +6652,7 @@
           <a:p>
             <a:fld id="{C80E15A5-E95B-43EB-9AC7-9A96397448C0}" type="datetimeFigureOut">
               <a:rPr lang="nl-BE" smtClean="0"/>
-              <a:t>9/10/2026</a:t>
+              <a:t>23/10/2026</a:t>
             </a:fld>
             <a:endParaRPr lang="nl-BE"/>
           </a:p>
@@ -6660,7 +6822,7 @@
           <a:p>
             <a:fld id="{C80E15A5-E95B-43EB-9AC7-9A96397448C0}" type="datetimeFigureOut">
               <a:rPr lang="nl-BE" smtClean="0"/>
-              <a:t>9/10/2026</a:t>
+              <a:t>23/10/2026</a:t>
             </a:fld>
             <a:endParaRPr lang="nl-BE"/>
           </a:p>
@@ -6906,7 +7068,7 @@
           <a:p>
             <a:fld id="{C80E15A5-E95B-43EB-9AC7-9A96397448C0}" type="datetimeFigureOut">
               <a:rPr lang="nl-BE" smtClean="0"/>
-              <a:t>9/10/2026</a:t>
+              <a:t>23/10/2026</a:t>
             </a:fld>
             <a:endParaRPr lang="nl-BE"/>
           </a:p>
@@ -7138,7 +7300,7 @@
           <a:p>
             <a:fld id="{C80E15A5-E95B-43EB-9AC7-9A96397448C0}" type="datetimeFigureOut">
               <a:rPr lang="nl-BE" smtClean="0"/>
-              <a:t>9/10/2026</a:t>
+              <a:t>23/10/2026</a:t>
             </a:fld>
             <a:endParaRPr lang="nl-BE"/>
           </a:p>
@@ -7505,7 +7667,7 @@
           <a:p>
             <a:fld id="{C80E15A5-E95B-43EB-9AC7-9A96397448C0}" type="datetimeFigureOut">
               <a:rPr lang="nl-BE" smtClean="0"/>
-              <a:t>9/10/2026</a:t>
+              <a:t>23/10/2026</a:t>
             </a:fld>
             <a:endParaRPr lang="nl-BE"/>
           </a:p>
@@ -7623,7 +7785,7 @@
           <a:p>
             <a:fld id="{C80E15A5-E95B-43EB-9AC7-9A96397448C0}" type="datetimeFigureOut">
               <a:rPr lang="nl-BE" smtClean="0"/>
-              <a:t>9/10/2026</a:t>
+              <a:t>23/10/2026</a:t>
             </a:fld>
             <a:endParaRPr lang="nl-BE"/>
           </a:p>
@@ -7718,7 +7880,7 @@
           <a:p>
             <a:fld id="{C80E15A5-E95B-43EB-9AC7-9A96397448C0}" type="datetimeFigureOut">
               <a:rPr lang="nl-BE" smtClean="0"/>
-              <a:t>9/10/2026</a:t>
+              <a:t>23/10/2026</a:t>
             </a:fld>
             <a:endParaRPr lang="nl-BE"/>
           </a:p>
@@ -7995,7 +8157,7 @@
           <a:p>
             <a:fld id="{C80E15A5-E95B-43EB-9AC7-9A96397448C0}" type="datetimeFigureOut">
               <a:rPr lang="nl-BE" smtClean="0"/>
-              <a:t>9/10/2026</a:t>
+              <a:t>23/10/2026</a:t>
             </a:fld>
             <a:endParaRPr lang="nl-BE"/>
           </a:p>
@@ -8248,7 +8410,7 @@
           <a:p>
             <a:fld id="{C80E15A5-E95B-43EB-9AC7-9A96397448C0}" type="datetimeFigureOut">
               <a:rPr lang="nl-BE" smtClean="0"/>
-              <a:t>9/10/2026</a:t>
+              <a:t>23/10/2026</a:t>
             </a:fld>
             <a:endParaRPr lang="nl-BE"/>
           </a:p>
@@ -8461,7 +8623,7 @@
           <a:p>
             <a:fld id="{C80E15A5-E95B-43EB-9AC7-9A96397448C0}" type="datetimeFigureOut">
               <a:rPr lang="nl-BE" smtClean="0"/>
-              <a:t>9/10/2026</a:t>
+              <a:t>23/10/2026</a:t>
             </a:fld>
             <a:endParaRPr lang="nl-BE"/>
           </a:p>
@@ -9196,14 +9358,11 @@
                 </a:pPr>
                 <a14:m>
                   <m:oMathPara xmlns:m="http://schemas.openxmlformats.org/officeDocument/2006/math">
-                    <m:oMathParaPr>
-                      <m:jc m:val="centerGroup"/>
-                    </m:oMathParaPr>
-                    <m:oMath xmlns:m="http://schemas.openxmlformats.org/officeDocument/2006/math">
+                    <m:oMath>
                       <m:sSub>
                         <m:sSubPr>
                           <m:ctrlPr>
-                            <a:rPr lang="pt-BR" sz="2600" i="1">
+                            <a:rPr lang="en-US" sz="2600" i="1">
                               <a:latin typeface="Cambria Math" panose="02040503050406030204" pitchFamily="18" charset="0"/>
                             </a:rPr>
                           </m:ctrlPr>
@@ -9909,8 +10068,12 @@
           <a:lstStyle/>
           <a:p>
             <a:r>
-              <a:rPr lang="pt-BR" dirty="0"/>
-              <a:t>Ajuda a </a:t>
+              <a:rPr lang="pt-BR" b="1" i="1" noProof="0" dirty="0">
+                <a:solidFill>
+                  <a:srgbClr val="00B050"/>
+                </a:solidFill>
+              </a:rPr>
+              <a:t>Acelera a convergência </a:t>
             </a:r>
             <a:r>
               <a:rPr lang="pt-BR" b="1" i="1" dirty="0">
@@ -9918,11 +10081,11 @@
                   <a:srgbClr val="00B050"/>
                 </a:solidFill>
               </a:rPr>
-              <a:t>acelerar a convergência </a:t>
-            </a:r>
-            <a:r>
-              <a:rPr lang="pt-BR" dirty="0"/>
-              <a:t>do gradiente descendente, pois deixa a superfície de erro mais circular.</a:t>
+              <a:t>do gradiente descendente</a:t>
+            </a:r>
+            <a:r>
+              <a:rPr lang="pt-BR" noProof="0" dirty="0"/>
+              <a:t>: superfície de erro fica mais circular e o gradiente passa a apontar direto para o mínimo.</a:t>
             </a:r>
           </a:p>
           <a:p>
@@ -9931,7 +10094,7 @@
               <a:buChar char="§"/>
             </a:pPr>
             <a:r>
-              <a:rPr lang="pt-BR" dirty="0"/>
+              <a:rPr lang="pt-BR" noProof="0" dirty="0"/>
               <a:t>Faz com que a inclinação da superfície se torne similar em todas as direções.</a:t>
             </a:r>
           </a:p>
@@ -9942,23 +10105,15 @@
                   <a:srgbClr val="00B050"/>
                 </a:solidFill>
               </a:rPr>
-              <a:t>Reduz problemas numéricos</a:t>
+              <a:t>Melhora a estabilidade numérica</a:t>
             </a:r>
             <a:r>
               <a:rPr lang="pt-BR" dirty="0"/>
-              <a:t> decorrentes de </a:t>
-            </a:r>
-            <a:r>
-              <a:rPr lang="pt-BR" b="1" i="1" dirty="0">
-                <a:solidFill>
-                  <a:srgbClr val="7030A0"/>
-                </a:solidFill>
-              </a:rPr>
-              <a:t>diferenças de escala entre atributos</a:t>
-            </a:r>
-            <a:r>
-              <a:rPr lang="pt-BR" dirty="0"/>
-              <a:t>, mantendo a estabilidade do algoritmo durante o treinamento.</a:t>
+              <a:t>: atributos com escalas diferentes geram gradientes de magnitudes muito diferentes por peso</a:t>
+            </a:r>
+            <a:r>
+              <a:rPr lang="pt-BR" noProof="0" dirty="0"/>
+              <a:t>.</a:t>
             </a:r>
           </a:p>
           <a:p>
@@ -9967,11 +10122,11 @@
               <a:buChar char="§"/>
             </a:pPr>
             <a:r>
-              <a:rPr lang="pt-BR" dirty="0"/>
-              <a:t>Sem escalonamento, os </a:t>
-            </a:r>
-            <a:r>
-              <a:rPr lang="pt-BR" b="1" i="1" dirty="0">
+              <a:rPr lang="pt-BR" noProof="0" dirty="0"/>
+              <a:t>Sem escalonamento, os valores absolutos dos </a:t>
+            </a:r>
+            <a:r>
+              <a:rPr lang="pt-BR" b="1" i="1" noProof="0" dirty="0">
                 <a:solidFill>
                   <a:srgbClr val="7030A0"/>
                 </a:solidFill>
@@ -9979,20 +10134,20 @@
               <a:t>gradientes</a:t>
             </a:r>
             <a:r>
-              <a:rPr lang="pt-BR" dirty="0"/>
+              <a:rPr lang="pt-BR" noProof="0" dirty="0"/>
               <a:t> podem se tornar </a:t>
             </a:r>
             <a:r>
-              <a:rPr lang="pt-BR" b="1" i="1" dirty="0">
+              <a:rPr lang="pt-BR" b="1" i="1" noProof="0" dirty="0">
                 <a:solidFill>
                   <a:srgbClr val="7030A0"/>
                 </a:solidFill>
               </a:rPr>
-              <a:t>extremamente grandes ou pequenos</a:t>
-            </a:r>
-            <a:r>
-              <a:rPr lang="pt-BR" dirty="0"/>
-              <a:t> e podem não ser representados pelas variáveis.</a:t>
+              <a:t>extremamente grandes </a:t>
+            </a:r>
+            <a:r>
+              <a:rPr lang="pt-BR" noProof="0" dirty="0"/>
+              <a:t>e podem não ser representados pelas variáveis.</a:t>
             </a:r>
           </a:p>
         </p:txBody>
@@ -10251,33 +10406,33 @@
         </p:spPr>
         <p:txBody>
           <a:bodyPr>
-            <a:normAutofit lnSpcReduction="10000"/>
+            <a:normAutofit/>
           </a:bodyPr>
           <a:lstStyle/>
           <a:p>
             <a:r>
-              <a:rPr lang="pt-BR" dirty="0"/>
-              <a:t>Possibilita a </a:t>
-            </a:r>
-            <a:r>
-              <a:rPr lang="pt-BR" b="1" i="1" dirty="0">
+              <a:rPr lang="pt-BR" noProof="0" dirty="0"/>
+              <a:t>Permite </a:t>
+            </a:r>
+            <a:r>
+              <a:rPr lang="pt-BR" b="1" i="1" noProof="0" dirty="0">
                 <a:solidFill>
                   <a:srgbClr val="00B050"/>
                 </a:solidFill>
               </a:rPr>
-              <a:t>comparação justa do peso (influência)</a:t>
-            </a:r>
-            <a:r>
-              <a:rPr lang="pt-BR" dirty="0"/>
+              <a:t>comparar a influência</a:t>
+            </a:r>
+            <a:r>
+              <a:rPr lang="pt-BR" noProof="0" dirty="0"/>
               <a:t> de cada </a:t>
             </a:r>
             <a:r>
-              <a:rPr lang="pt-BR" b="1" i="1" dirty="0"/>
+              <a:rPr lang="pt-BR" b="1" i="1" noProof="0" dirty="0"/>
               <a:t>atributo</a:t>
             </a:r>
             <a:r>
-              <a:rPr lang="pt-BR" dirty="0"/>
-              <a:t> no modelo.</a:t>
+              <a:rPr lang="pt-BR" noProof="0" dirty="0"/>
+              <a:t> no modelo de forma justa.</a:t>
             </a:r>
           </a:p>
           <a:p>
@@ -10286,17 +10441,17 @@
               <a:buChar char="§"/>
             </a:pPr>
             <a:r>
-              <a:rPr lang="pt-BR" dirty="0"/>
+              <a:rPr lang="pt-BR" noProof="0" dirty="0"/>
               <a:t>P</a:t>
             </a:r>
             <a:r>
-              <a:rPr lang="pt-BR" b="0" i="0" dirty="0">
+              <a:rPr lang="pt-BR" b="0" i="0" noProof="0" dirty="0">
                 <a:effectLst/>
               </a:rPr>
               <a:t>ois os pesos representam o </a:t>
             </a:r>
             <a:r>
-              <a:rPr lang="pt-BR" b="1" i="1" dirty="0">
+              <a:rPr lang="pt-BR" b="1" i="1" noProof="0" dirty="0">
                 <a:solidFill>
                   <a:schemeClr val="accent2"/>
                 </a:solidFill>
@@ -10305,7 +10460,7 @@
               <a:t>impacto dos atributos</a:t>
             </a:r>
             <a:r>
-              <a:rPr lang="pt-BR" b="0" i="0" dirty="0">
+              <a:rPr lang="pt-BR" b="0" i="0" noProof="0" dirty="0">
                 <a:effectLst/>
               </a:rPr>
               <a:t> nas predições (importância para o modelo).</a:t>
@@ -10313,11 +10468,11 @@
           </a:p>
           <a:p>
             <a:r>
-              <a:rPr lang="pt-BR" dirty="0"/>
+              <a:rPr lang="pt-BR" noProof="0" dirty="0"/>
               <a:t>Evita que </a:t>
             </a:r>
             <a:r>
-              <a:rPr lang="pt-BR" b="1" i="1" dirty="0">
+              <a:rPr lang="pt-BR" b="1" i="1" noProof="0" dirty="0">
                 <a:solidFill>
                   <a:srgbClr val="00B050"/>
                 </a:solidFill>
@@ -10325,7 +10480,7 @@
               <a:t>atributos com escalas muito diferentes dominem o processo de treinamento</a:t>
             </a:r>
             <a:r>
-              <a:rPr lang="pt-BR" dirty="0"/>
+              <a:rPr lang="pt-BR" noProof="0" dirty="0"/>
               <a:t>. </a:t>
             </a:r>
           </a:p>
@@ -10335,42 +10490,9 @@
               <a:buChar char="§"/>
             </a:pPr>
             <a:r>
-              <a:rPr lang="pt-BR" i="0" dirty="0">
-                <a:effectLst/>
-              </a:rPr>
-              <a:t>Sem escalonamento, o modelo </a:t>
-            </a:r>
-            <a:r>
-              <a:rPr lang="pt-BR" dirty="0"/>
-              <a:t>pode</a:t>
-            </a:r>
-            <a:r>
-              <a:rPr lang="pt-BR" i="0" dirty="0">
-                <a:effectLst/>
-              </a:rPr>
-              <a:t> dar mais importância a </a:t>
-            </a:r>
-            <a:r>
-              <a:rPr lang="pt-BR" dirty="0"/>
-              <a:t>atributos com intervalos maiores </a:t>
-            </a:r>
-            <a:r>
-              <a:rPr lang="pt-BR" i="0" dirty="0">
-                <a:effectLst/>
-              </a:rPr>
-              <a:t>e menos importância </a:t>
-            </a:r>
-            <a:r>
-              <a:rPr lang="pt-BR" dirty="0"/>
-              <a:t>a</a:t>
-            </a:r>
-            <a:r>
-              <a:rPr lang="pt-BR" i="0" dirty="0">
-                <a:effectLst/>
-              </a:rPr>
-              <a:t> atributos com intervalos menores.</a:t>
-            </a:r>
-            <a:endParaRPr lang="pt-BR" dirty="0"/>
+              <a:rPr lang="pt-BR" noProof="0" dirty="0"/>
+              <a:t>O gradiente é dominado por eles, o que exige uma taxa de aprendizado pequena e retarda o aprendizado dos demais pesos.</a:t>
+            </a:r>
           </a:p>
         </p:txBody>
       </p:sp>
@@ -10729,7 +10851,7 @@
                   <a:srgbClr val="7030A0"/>
                 </a:solidFill>
               </a:rPr>
-              <a:t>05/06/2026 – Sala 1.1 (Prédio VI)</a:t>
+              <a:t>06/11/2026 – Sala I-20</a:t>
             </a:r>
           </a:p>
           <a:p>
@@ -10779,7 +10901,7 @@
                   <a:srgbClr val="0070C0"/>
                 </a:solidFill>
               </a:rPr>
-              <a:t>27/06/2026</a:t>
+              <a:t>27/11/2026</a:t>
             </a:r>
             <a:r>
               <a:rPr lang="pt-BR" dirty="0"/>
@@ -11259,8 +11381,8 @@
         </p:nvSpPr>
         <p:spPr>
           <a:xfrm>
-            <a:off x="280827" y="2644952"/>
-            <a:ext cx="11630345" cy="1568096"/>
+            <a:off x="280827" y="2386453"/>
+            <a:ext cx="11630345" cy="2085093"/>
           </a:xfrm>
         </p:spPr>
         <p:txBody>
@@ -11282,7 +11404,7 @@
                   <a:srgbClr val="7030A0"/>
                 </a:solidFill>
               </a:rPr>
-              <a:t>hiperplanos não se ajustam bem aos dados</a:t>
+              <a:t>hiperplanos não se ajustam bem ao comportamento geral dos dados</a:t>
             </a:r>
             <a:r>
               <a:rPr lang="pt-BR" sz="4800" dirty="0"/>
@@ -11649,8 +11771,8 @@
         </p:nvSpPr>
         <p:spPr>
           <a:xfrm>
-            <a:off x="5147733" y="1825624"/>
-            <a:ext cx="6914128" cy="5032375"/>
+            <a:off x="5147732" y="1825624"/>
+            <a:ext cx="7044267" cy="5032375"/>
           </a:xfrm>
         </p:spPr>
         <p:txBody>
@@ -11744,18 +11866,8 @@
                   <a:srgbClr val="7030A0"/>
                 </a:solidFill>
               </a:rPr>
-              <a:t>encontrar o grau ideal</a:t>
-            </a:r>
-            <a:r>
-              <a:rPr lang="pt-BR" dirty="0"/>
-              <a:t>.</a:t>
-            </a:r>
-          </a:p>
-          <a:p>
-            <a:pPr lvl="1">
-              <a:buFont typeface="Wingdings" panose="05000000000000000000" pitchFamily="2" charset="2"/>
-              <a:buChar char="§"/>
-            </a:pPr>
+              <a:t>encontrar o grau ideal </a:t>
+            </a:r>
             <a:r>
               <a:rPr lang="pt-BR" dirty="0"/>
               <a:t>e, claro, os pesos do polinômio.</a:t>
@@ -11868,8 +11980,8 @@
           </a:p>
         </p:txBody>
       </p:sp>
-      <mc:AlternateContent xmlns:mc="http://schemas.openxmlformats.org/markup-compatibility/2006" xmlns:a14="http://schemas.microsoft.com/office/drawing/2010/main">
-        <mc:Choice Requires="a14">
+      <mc:AlternateContent xmlns:mc="http://schemas.openxmlformats.org/markup-compatibility/2006">
+        <mc:Choice xmlns:a14="http://schemas.microsoft.com/office/drawing/2010/main" Requires="a14">
           <p:sp>
             <p:nvSpPr>
               <p:cNvPr id="3" name="Espaço Reservado para Conteúdo 2">
@@ -12011,10 +12123,7 @@
                 </a:pPr>
                 <a14:m>
                   <m:oMathPara xmlns:m="http://schemas.openxmlformats.org/officeDocument/2006/math">
-                    <m:oMathParaPr>
-                      <m:jc m:val="centerGroup"/>
-                    </m:oMathParaPr>
-                    <m:oMath xmlns:m="http://schemas.openxmlformats.org/officeDocument/2006/math">
+                    <m:oMath>
                       <m:sSub>
                         <m:sSubPr>
                           <m:ctrlPr>
@@ -12677,8 +12786,12 @@
               </a:p>
               <a:p>
                 <a:r>
+                  <a:rPr lang="pt-BR" b="1" dirty="0"/>
+                  <a:t>OBS</a:t>
+                </a:r>
+                <a:r>
                   <a:rPr lang="pt-BR" dirty="0"/>
-                  <a:t>Um problema com polinômios é que a presença de </a:t>
+                  <a:t>.: Um problema com polinômios é que a presença de </a:t>
                 </a:r>
                 <a:r>
                   <a:rPr lang="pt-BR" b="1" i="1" dirty="0">
@@ -12799,7 +12912,7 @@
             </p:txBody>
           </p:sp>
         </mc:Choice>
-        <mc:Fallback xmlns="">
+        <mc:Fallback>
           <p:sp>
             <p:nvSpPr>
               <p:cNvPr id="3" name="Espaço Reservado para Conteúdo 2">
@@ -12833,7 +12946,7 @@
               <a:lstStyle/>
               <a:p>
                 <a:r>
-                  <a:rPr lang="pt-BR">
+                  <a:rPr lang="en-US">
                     <a:noFill/>
                   </a:rPr>
                   <a:t> </a:t>
@@ -13287,15 +13400,12 @@
                 </a:pPr>
                 <a14:m>
                   <m:oMathPara xmlns:m="http://schemas.openxmlformats.org/officeDocument/2006/math">
-                    <m:oMathParaPr>
-                      <m:jc m:val="centerGroup"/>
-                    </m:oMathParaPr>
-                    <m:oMath xmlns:m="http://schemas.openxmlformats.org/officeDocument/2006/math">
+                    <m:oMath>
                       <m:r>
                         <a:rPr lang="pt-BR" i="1">
                           <a:latin typeface="Cambria Math" panose="02040503050406030204" pitchFamily="18" charset="0"/>
                         </a:rPr>
-                        <m:t>h</m:t>
+                        <m:t>ℎ</m:t>
                       </m:r>
                       <m:d>
                         <m:dPr>
@@ -13749,7 +13859,7 @@
                     <m:sSup>
                       <m:sSupPr>
                         <m:ctrlPr>
-                          <a:rPr lang="pt-BR" b="0" i="1" smtClean="0">
+                          <a:rPr lang="pt-BR" i="1">
                             <a:latin typeface="Cambria Math" panose="02040503050406030204" pitchFamily="18" charset="0"/>
                           </a:rPr>
                         </m:ctrlPr>
@@ -14515,8 +14625,8 @@
           </a:p>
         </p:txBody>
       </p:sp>
-      <mc:AlternateContent xmlns:mc="http://schemas.openxmlformats.org/markup-compatibility/2006" xmlns:a14="http://schemas.microsoft.com/office/drawing/2010/main">
-        <mc:Choice Requires="a14">
+      <mc:AlternateContent xmlns:mc="http://schemas.openxmlformats.org/markup-compatibility/2006">
+        <mc:Choice xmlns:a14="http://schemas.microsoft.com/office/drawing/2010/main" Requires="a14">
           <p:sp>
             <p:nvSpPr>
               <p:cNvPr id="3" name="Espaço Reservado para Conteúdo 2">
@@ -14626,15 +14736,12 @@
                 </a:pPr>
                 <a14:m>
                   <m:oMathPara xmlns:m="http://schemas.openxmlformats.org/officeDocument/2006/math">
-                    <m:oMathParaPr>
-                      <m:jc m:val="centerGroup"/>
-                    </m:oMathParaPr>
-                    <m:oMath xmlns:m="http://schemas.openxmlformats.org/officeDocument/2006/math">
+                    <m:oMath>
                       <m:r>
                         <a:rPr lang="pt-BR" i="1" smtClean="0">
                           <a:latin typeface="Cambria Math" panose="02040503050406030204" pitchFamily="18" charset="0"/>
                         </a:rPr>
-                        <m:t>h</m:t>
+                        <m:t>ℎ</m:t>
                       </m:r>
                       <m:d>
                         <m:dPr>
@@ -15030,10 +15137,7 @@
                 </a:pPr>
                 <a14:m>
                   <m:oMathPara xmlns:m="http://schemas.openxmlformats.org/officeDocument/2006/math">
-                    <m:oMathParaPr>
-                      <m:jc m:val="centerGroup"/>
-                    </m:oMathParaPr>
-                    <m:oMath xmlns:m="http://schemas.openxmlformats.org/officeDocument/2006/math">
+                    <m:oMath>
                       <m:r>
                         <a:rPr lang="pt-BR" b="1" i="1" smtClean="0">
                           <a:latin typeface="Cambria Math" panose="02040503050406030204" pitchFamily="18" charset="0"/>
@@ -15703,7 +15807,7 @@
             </p:txBody>
           </p:sp>
         </mc:Choice>
-        <mc:Fallback xmlns="">
+        <mc:Fallback>
           <p:sp>
             <p:nvSpPr>
               <p:cNvPr id="3" name="Espaço Reservado para Conteúdo 2">
@@ -15838,8 +15942,8 @@
         </p:nvSpPr>
         <p:spPr>
           <a:xfrm>
-            <a:off x="327060" y="2775003"/>
-            <a:ext cx="11537879" cy="1307993"/>
+            <a:off x="327060" y="2749162"/>
+            <a:ext cx="11537879" cy="1359675"/>
           </a:xfrm>
         </p:spPr>
         <p:txBody>
@@ -15869,7 +15973,7 @@
             </a:r>
             <a:r>
               <a:rPr lang="pt-BR" sz="4000" dirty="0"/>
-              <a:t>que melhor aproxime os dados.</a:t>
+              <a:t>que melhor se aproxime os dados.</a:t>
             </a:r>
           </a:p>
           <a:p>
@@ -15943,7 +16047,7 @@
         <p:spPr>
           <a:xfrm>
             <a:off x="838200" y="5167312"/>
-            <a:ext cx="11254485" cy="1690688"/>
+            <a:ext cx="11353800" cy="1690688"/>
           </a:xfrm>
         </p:spPr>
         <p:txBody>
@@ -16101,8 +16205,8 @@
           </a:p>
         </p:txBody>
       </p:sp>
-      <mc:AlternateContent xmlns:mc="http://schemas.openxmlformats.org/markup-compatibility/2006" xmlns:a14="http://schemas.microsoft.com/office/drawing/2010/main">
-        <mc:Choice Requires="a14">
+      <mc:AlternateContent xmlns:mc="http://schemas.openxmlformats.org/markup-compatibility/2006">
+        <mc:Choice xmlns:a14="http://schemas.microsoft.com/office/drawing/2010/main" Requires="a14">
           <p:sp>
             <p:nvSpPr>
               <p:cNvPr id="3" name="Content Placeholder 2"/>
@@ -16155,7 +16259,7 @@
                       <a:srgbClr val="7030A0"/>
                     </a:solidFill>
                   </a:rPr>
-                  <a:t>30 exemplos </a:t>
+                  <a:t>30 amostras </a:t>
                 </a:r>
                 <a:r>
                   <a:rPr lang="pt-BR" dirty="0"/>
@@ -16674,7 +16778,7 @@
                     <m:d>
                       <m:dPr>
                         <m:ctrlPr>
-                          <a:rPr lang="pt-BR" i="1">
+                          <a:rPr lang="pt-BR">
                             <a:latin typeface="Cambria Math" panose="02040503050406030204" pitchFamily="18" charset="0"/>
                             <a:ea typeface="Cambria Math" panose="02040503050406030204" pitchFamily="18" charset="0"/>
                           </a:rPr>
@@ -16704,7 +16808,7 @@
             </p:txBody>
           </p:sp>
         </mc:Choice>
-        <mc:Fallback xmlns="">
+        <mc:Fallback>
           <p:sp>
             <p:nvSpPr>
               <p:cNvPr id="3" name="Content Placeholder 2"/>
@@ -18777,8 +18881,8 @@
           </a:p>
         </p:txBody>
       </p:sp>
-      <mc:AlternateContent xmlns:mc="http://schemas.openxmlformats.org/markup-compatibility/2006">
-        <mc:Choice xmlns:a14="http://schemas.microsoft.com/office/drawing/2010/main" Requires="a14">
+      <mc:AlternateContent xmlns:mc="http://schemas.openxmlformats.org/markup-compatibility/2006" xmlns:a14="http://schemas.microsoft.com/office/drawing/2010/main">
+        <mc:Choice Requires="a14">
           <p:sp>
             <p:nvSpPr>
               <p:cNvPr id="3" name="Espaço Reservado para Conteúdo 2">
@@ -18938,7 +19042,7 @@
             </p:txBody>
           </p:sp>
         </mc:Choice>
-        <mc:Fallback>
+        <mc:Fallback xmlns="">
           <p:sp>
             <p:nvSpPr>
               <p:cNvPr id="3" name="Espaço Reservado para Conteúdo 2">
@@ -19018,7 +19122,7 @@
                     <m:oMathParaPr>
                       <m:jc m:val="center"/>
                     </m:oMathParaPr>
-                    <m:oMath xmlns:m="http://schemas.openxmlformats.org/officeDocument/2006/math">
+                    <m:oMath>
                       <m:sSub>
                         <m:sSubPr>
                           <m:ctrlPr>
@@ -19135,7 +19239,7 @@
                           <m:sSup>
                             <m:sSupPr>
                               <m:ctrlPr>
-                                <a:rPr lang="pt-BR" sz="2400" i="1" smtClean="0">
+                                <a:rPr lang="pt-BR" sz="2400" i="1">
                                   <a:latin typeface="Cambria Math" panose="02040503050406030204" pitchFamily="18" charset="0"/>
                                 </a:rPr>
                               </m:ctrlPr>
@@ -19201,7 +19305,7 @@
                                   <m:limLow>
                                     <m:limLowPr>
                                       <m:ctrlPr>
-                                        <a:rPr lang="pt-BR" sz="2400" i="1" smtClean="0">
+                                        <a:rPr lang="pt-BR" sz="2400" i="1">
                                           <a:latin typeface="Cambria Math" panose="02040503050406030204" pitchFamily="18" charset="0"/>
                                         </a:rPr>
                                       </m:ctrlPr>
@@ -19210,6 +19314,8 @@
                                       <m:groupChr>
                                         <m:groupChrPr>
                                           <m:chr m:val="⏟"/>
+                                          <m:pos m:val="bot"/>
+                                          <m:vertJc m:val="top"/>
                                           <m:ctrlPr>
                                             <a:rPr lang="pt-BR" sz="2400" i="1">
                                               <a:latin typeface="Cambria Math" panose="02040503050406030204" pitchFamily="18" charset="0"/>
@@ -19799,10 +19905,7 @@
                 <a:pPr/>
                 <a14:m>
                   <m:oMathPara xmlns:m="http://schemas.openxmlformats.org/officeDocument/2006/math">
-                    <m:oMathParaPr>
-                      <m:jc m:val="centerGroup"/>
-                    </m:oMathParaPr>
-                    <m:oMath xmlns:m="http://schemas.openxmlformats.org/officeDocument/2006/math">
+                    <m:oMath>
                       <m:sSub>
                         <m:sSubPr>
                           <m:ctrlPr>
@@ -20321,7 +20424,7 @@
                   <a:srgbClr val="00B050"/>
                 </a:solidFill>
               </a:rPr>
-              <a:t>Entrega do projeto final: 27/06/2026</a:t>
+              <a:t>Entrega do projeto final: 27/11/2026</a:t>
             </a:r>
           </a:p>
           <a:p>
@@ -20683,10 +20786,7 @@
                 </a:pPr>
                 <a14:m>
                   <m:oMathPara xmlns:m="http://schemas.openxmlformats.org/officeDocument/2006/math">
-                    <m:oMathParaPr>
-                      <m:jc m:val="centerGroup"/>
-                    </m:oMathParaPr>
-                    <m:oMath xmlns:m="http://schemas.openxmlformats.org/officeDocument/2006/math">
+                    <m:oMath>
                       <m:acc>
                         <m:accPr>
                           <m:chr m:val="̂"/>
@@ -20855,14 +20955,11 @@
                 </a:pPr>
                 <a14:m>
                   <m:oMathPara xmlns:m="http://schemas.openxmlformats.org/officeDocument/2006/math">
-                    <m:oMathParaPr>
-                      <m:jc m:val="centerGroup"/>
-                    </m:oMathParaPr>
-                    <m:oMath xmlns:m="http://schemas.openxmlformats.org/officeDocument/2006/math">
+                    <m:oMath>
                       <m:sSub>
                         <m:sSubPr>
                           <m:ctrlPr>
-                            <a:rPr lang="pt-BR" i="1">
+                            <a:rPr lang="en-US" i="1">
                               <a:latin typeface="Cambria Math" panose="02040503050406030204" pitchFamily="18" charset="0"/>
                             </a:rPr>
                           </m:ctrlPr>
@@ -21378,10 +21475,7 @@
                 </a:pPr>
                 <a14:m>
                   <m:oMathPara xmlns:m="http://schemas.openxmlformats.org/officeDocument/2006/math">
-                    <m:oMathParaPr>
-                      <m:jc m:val="centerGroup"/>
-                    </m:oMathParaPr>
-                    <m:oMath xmlns:m="http://schemas.openxmlformats.org/officeDocument/2006/math">
+                    <m:oMath>
                       <m:sSub>
                         <m:sSubPr>
                           <m:ctrlPr>
@@ -21653,10 +21747,7 @@
                 </a:pPr>
                 <a14:m>
                   <m:oMathPara xmlns:m="http://schemas.openxmlformats.org/officeDocument/2006/math">
-                    <m:oMathParaPr>
-                      <m:jc m:val="centerGroup"/>
-                    </m:oMathParaPr>
-                    <m:oMath xmlns:m="http://schemas.openxmlformats.org/officeDocument/2006/math">
+                    <m:oMath>
                       <m:acc>
                         <m:accPr>
                           <m:chr m:val="̂"/>
@@ -22466,10 +22557,7 @@
                 </a:pPr>
                 <a14:m>
                   <m:oMathPara xmlns:m="http://schemas.openxmlformats.org/officeDocument/2006/math">
-                    <m:oMathParaPr>
-                      <m:jc m:val="centerGroup"/>
-                    </m:oMathParaPr>
-                    <m:oMath xmlns:m="http://schemas.openxmlformats.org/officeDocument/2006/math">
+                    <m:oMath>
                       <m:acc>
                         <m:accPr>
                           <m:chr m:val="̂"/>
@@ -24186,10 +24274,7 @@
                   <a:pPr/>
                   <a14:m>
                     <m:oMathPara xmlns:m="http://schemas.openxmlformats.org/officeDocument/2006/math">
-                      <m:oMathParaPr>
-                        <m:jc m:val="centerGroup"/>
-                      </m:oMathParaPr>
-                      <m:oMath xmlns:m="http://schemas.openxmlformats.org/officeDocument/2006/math">
+                      <m:oMath>
                         <m:sSub>
                           <m:sSubPr>
                             <m:ctrlPr>
@@ -24289,10 +24374,7 @@
                   <a:pPr/>
                   <a14:m>
                     <m:oMathPara xmlns:m="http://schemas.openxmlformats.org/officeDocument/2006/math">
-                      <m:oMathParaPr>
-                        <m:jc m:val="centerGroup"/>
-                      </m:oMathParaPr>
-                      <m:oMath xmlns:m="http://schemas.openxmlformats.org/officeDocument/2006/math">
+                      <m:oMath>
                         <m:sSub>
                           <m:sSubPr>
                             <m:ctrlPr>
@@ -24875,10 +24957,7 @@
                   <a:pPr/>
                   <a14:m>
                     <m:oMathPara xmlns:m="http://schemas.openxmlformats.org/officeDocument/2006/math">
-                      <m:oMathParaPr>
-                        <m:jc m:val="centerGroup"/>
-                      </m:oMathParaPr>
-                      <m:oMath xmlns:m="http://schemas.openxmlformats.org/officeDocument/2006/math">
+                      <m:oMath>
                         <m:sSub>
                           <m:sSubPr>
                             <m:ctrlPr>
@@ -24978,10 +25057,7 @@
                   <a:pPr/>
                   <a14:m>
                     <m:oMathPara xmlns:m="http://schemas.openxmlformats.org/officeDocument/2006/math">
-                      <m:oMathParaPr>
-                        <m:jc m:val="centerGroup"/>
-                      </m:oMathParaPr>
-                      <m:oMath xmlns:m="http://schemas.openxmlformats.org/officeDocument/2006/math">
+                      <m:oMath>
                         <m:sSub>
                           <m:sSubPr>
                             <m:ctrlPr>
@@ -27494,10 +27570,7 @@
                 </a:pPr>
                 <a14:m>
                   <m:oMathPara xmlns:m="http://schemas.openxmlformats.org/officeDocument/2006/math">
-                    <m:oMathParaPr>
-                      <m:jc m:val="centerGroup"/>
-                    </m:oMathParaPr>
-                    <m:oMath xmlns:m="http://schemas.openxmlformats.org/officeDocument/2006/math">
+                    <m:oMath>
                       <m:sSub>
                         <m:sSubPr>
                           <m:ctrlPr>
@@ -28117,10 +28190,7 @@
                 </a:pPr>
                 <a14:m>
                   <m:oMathPara xmlns:m="http://schemas.openxmlformats.org/officeDocument/2006/math">
-                    <m:oMathParaPr>
-                      <m:jc m:val="centerGroup"/>
-                    </m:oMathParaPr>
-                    <m:oMath xmlns:m="http://schemas.openxmlformats.org/officeDocument/2006/math">
+                    <m:oMath>
                       <m:sSub>
                         <m:sSubPr>
                           <m:ctrlPr>
@@ -28237,7 +28307,7 @@
                           <m:sSup>
                             <m:sSupPr>
                               <m:ctrlPr>
-                                <a:rPr lang="pt-BR" i="1" smtClean="0">
+                                <a:rPr lang="pt-BR" i="1">
                                   <a:latin typeface="Cambria Math" panose="02040503050406030204" pitchFamily="18" charset="0"/>
                                 </a:rPr>
                               </m:ctrlPr>
@@ -28303,7 +28373,7 @@
                                   <m:limLow>
                                     <m:limLowPr>
                                       <m:ctrlPr>
-                                        <a:rPr lang="pt-BR" i="1" smtClean="0">
+                                        <a:rPr lang="pt-BR" i="1">
                                           <a:latin typeface="Cambria Math" panose="02040503050406030204" pitchFamily="18" charset="0"/>
                                         </a:rPr>
                                       </m:ctrlPr>
@@ -28312,6 +28382,8 @@
                                       <m:groupChr>
                                         <m:groupChrPr>
                                           <m:chr m:val="⏟"/>
+                                          <m:pos m:val="bot"/>
+                                          <m:vertJc m:val="top"/>
                                           <m:ctrlPr>
                                             <a:rPr lang="pt-BR" i="1">
                                               <a:latin typeface="Cambria Math" panose="02040503050406030204" pitchFamily="18" charset="0"/>
@@ -28962,11 +29034,11 @@
                     <m:oMathParaPr>
                       <m:jc m:val="center"/>
                     </m:oMathParaPr>
-                    <m:oMath xmlns:m="http://schemas.openxmlformats.org/officeDocument/2006/math">
+                    <m:oMath>
                       <m:sSub>
                         <m:sSubPr>
                           <m:ctrlPr>
-                            <a:rPr lang="pt-BR" i="1">
+                            <a:rPr lang="en-US" i="1">
                               <a:latin typeface="Cambria Math" panose="02040503050406030204" pitchFamily="18" charset="0"/>
                             </a:rPr>
                           </m:ctrlPr>
@@ -29099,7 +29171,7 @@
                           <m:d>
                             <m:dPr>
                               <m:ctrlPr>
-                                <a:rPr lang="en-US" i="1">
+                                <a:rPr lang="en-US" b="1" i="1">
                                   <a:latin typeface="Cambria Math" panose="02040503050406030204" pitchFamily="18" charset="0"/>
                                 </a:rPr>
                               </m:ctrlPr>
@@ -29146,7 +29218,7 @@
                           <m:d>
                             <m:dPr>
                               <m:ctrlPr>
-                                <a:rPr lang="en-US" i="1">
+                                <a:rPr lang="en-US" b="1" i="1">
                                   <a:latin typeface="Cambria Math" panose="02040503050406030204" pitchFamily="18" charset="0"/>
                                 </a:rPr>
                               </m:ctrlPr>
@@ -29197,7 +29269,7 @@
                           <m:d>
                             <m:dPr>
                               <m:ctrlPr>
-                                <a:rPr lang="en-US" i="1">
+                                <a:rPr lang="en-US" b="1" i="1">
                                   <a:latin typeface="Cambria Math" panose="02040503050406030204" pitchFamily="18" charset="0"/>
                                 </a:rPr>
                               </m:ctrlPr>
@@ -29422,7 +29494,7 @@
                     <m:d>
                       <m:dPr>
                         <m:ctrlPr>
-                          <a:rPr lang="en-US" i="1">
+                          <a:rPr lang="en-US" b="1" i="1">
                             <a:latin typeface="Cambria Math" panose="02040503050406030204" pitchFamily="18" charset="0"/>
                           </a:rPr>
                         </m:ctrlPr>
@@ -29475,7 +29547,7 @@
                     <m:d>
                       <m:dPr>
                         <m:ctrlPr>
-                          <a:rPr lang="en-US" i="1">
+                          <a:rPr lang="en-US" b="1" i="1">
                             <a:latin typeface="Cambria Math" panose="02040503050406030204" pitchFamily="18" charset="0"/>
                           </a:rPr>
                         </m:ctrlPr>
@@ -30158,6 +30230,15 @@
 </file>
 
 <file path=customXml/item1.xml><?xml version="1.0" encoding="utf-8"?>
+<?mso-contentType ?>
+<FormTemplates xmlns="http://schemas.microsoft.com/sharepoint/v3/contenttype/forms">
+  <Display>DocumentLibraryForm</Display>
+  <Edit>DocumentLibraryForm</Edit>
+  <New>DocumentLibraryForm</New>
+</FormTemplates>
+</file>
+
+<file path=customXml/item2.xml><?xml version="1.0" encoding="utf-8"?>
 <ct:contentTypeSchema xmlns:ct="http://schemas.microsoft.com/office/2006/metadata/contentType" xmlns:ma="http://schemas.microsoft.com/office/2006/metadata/properties/metaAttributes" ct:_="" ma:_="" ma:contentTypeName="Document" ma:contentTypeID="0x010100A6553FE09A98904B92A9D00A38127206" ma:contentTypeVersion="18" ma:contentTypeDescription="Create a new document." ma:contentTypeScope="" ma:versionID="92863cfdd2d5fd2ee9b6f30d8c51b1f5">
   <xsd:schema xmlns:xsd="http://www.w3.org/2001/XMLSchema" xmlns:xs="http://www.w3.org/2001/XMLSchema" xmlns:p="http://schemas.microsoft.com/office/2006/metadata/properties" xmlns:ns3="10322600-47b9-44f6-86ef-c87c87ba6e82" xmlns:ns4="026c264a-64f6-48aa-bde0-8bf9e5064f89" targetNamespace="http://schemas.microsoft.com/office/2006/metadata/properties" ma:root="true" ma:fieldsID="86148dd4b4cd32a5258cd233a95bdcf5" ns3:_="" ns4:_="">
     <xsd:import namespace="10322600-47b9-44f6-86ef-c87c87ba6e82"/>
@@ -30410,15 +30491,6 @@
 </ct:contentTypeSchema>
 </file>
 
-<file path=customXml/item2.xml><?xml version="1.0" encoding="utf-8"?>
-<?mso-contentType ?>
-<FormTemplates xmlns="http://schemas.microsoft.com/sharepoint/v3/contenttype/forms">
-  <Display>DocumentLibraryForm</Display>
-  <Edit>DocumentLibraryForm</Edit>
-  <New>DocumentLibraryForm</New>
-</FormTemplates>
-</file>
-
 <file path=customXml/item3.xml><?xml version="1.0" encoding="utf-8"?>
 <p:properties xmlns:p="http://schemas.microsoft.com/office/2006/metadata/properties" xmlns:xsi="http://www.w3.org/2001/XMLSchema-instance" xmlns:pc="http://schemas.microsoft.com/office/infopath/2007/PartnerControls">
   <documentManagement>
@@ -30428,6 +30500,14 @@
 </file>
 
 <file path=customXml/itemProps1.xml><?xml version="1.0" encoding="utf-8"?>
+<ds:datastoreItem xmlns:ds="http://schemas.openxmlformats.org/officeDocument/2006/customXml" ds:itemID="{D67F36EB-496F-4262-A9FD-0843EF3B6D81}">
+  <ds:schemaRefs>
+    <ds:schemaRef ds:uri="http://schemas.microsoft.com/sharepoint/v3/contenttype/forms"/>
+  </ds:schemaRefs>
+</ds:datastoreItem>
+</file>
+
+<file path=customXml/itemProps2.xml><?xml version="1.0" encoding="utf-8"?>
 <ds:datastoreItem xmlns:ds="http://schemas.openxmlformats.org/officeDocument/2006/customXml" ds:itemID="{43BF8E7A-7F85-4B5C-91EE-1390147153F1}">
   <ds:schemaRefs>
     <ds:schemaRef ds:uri="http://schemas.microsoft.com/office/2006/metadata/contentType"/>
@@ -30446,14 +30526,6 @@
 </ds:datastoreItem>
 </file>
 
-<file path=customXml/itemProps2.xml><?xml version="1.0" encoding="utf-8"?>
-<ds:datastoreItem xmlns:ds="http://schemas.openxmlformats.org/officeDocument/2006/customXml" ds:itemID="{D67F36EB-496F-4262-A9FD-0843EF3B6D81}">
-  <ds:schemaRefs>
-    <ds:schemaRef ds:uri="http://schemas.microsoft.com/sharepoint/v3/contenttype/forms"/>
-  </ds:schemaRefs>
-</ds:datastoreItem>
-</file>
-
 <file path=customXml/itemProps3.xml><?xml version="1.0" encoding="utf-8"?>
 <ds:datastoreItem xmlns:ds="http://schemas.openxmlformats.org/officeDocument/2006/customXml" ds:itemID="{0377E4F8-F73A-4838-818D-26069B242819}">
   <ds:schemaRefs>

--- a/slides/T319_Regressão_Linear (Parte IV).pptx
+++ b/slides/T319_Regressão_Linear (Parte IV).pptx
@@ -9358,7 +9358,10 @@
                 </a:pPr>
                 <a14:m>
                   <m:oMathPara xmlns:m="http://schemas.openxmlformats.org/officeDocument/2006/math">
-                    <m:oMath>
+                    <m:oMathParaPr>
+                      <m:jc m:val="centerGroup"/>
+                    </m:oMathParaPr>
+                    <m:oMath xmlns:m="http://schemas.openxmlformats.org/officeDocument/2006/math">
                       <m:sSub>
                         <m:sSubPr>
                           <m:ctrlPr>
@@ -10491,7 +10494,7 @@
             </a:pPr>
             <a:r>
               <a:rPr lang="pt-BR" noProof="0" dirty="0"/>
-              <a:t>O gradiente é dominado por eles, o que exige uma taxa de aprendizado pequena e retarda o aprendizado dos demais pesos.</a:t>
+              <a:t>O gradiente pode ser dominado por atributos com grandes escalas, o que exige uma taxa de aprendizado pequena e retarda o aprendizado dos demais pesos.</a:t>
             </a:r>
           </a:p>
         </p:txBody>
@@ -11980,8 +11983,8 @@
           </a:p>
         </p:txBody>
       </p:sp>
-      <mc:AlternateContent xmlns:mc="http://schemas.openxmlformats.org/markup-compatibility/2006">
-        <mc:Choice xmlns:a14="http://schemas.microsoft.com/office/drawing/2010/main" Requires="a14">
+      <mc:AlternateContent xmlns:mc="http://schemas.openxmlformats.org/markup-compatibility/2006" xmlns:a14="http://schemas.microsoft.com/office/drawing/2010/main">
+        <mc:Choice Requires="a14">
           <p:sp>
             <p:nvSpPr>
               <p:cNvPr id="3" name="Espaço Reservado para Conteúdo 2">
@@ -12123,7 +12126,10 @@
                 </a:pPr>
                 <a14:m>
                   <m:oMathPara xmlns:m="http://schemas.openxmlformats.org/officeDocument/2006/math">
-                    <m:oMath>
+                    <m:oMathParaPr>
+                      <m:jc m:val="centerGroup"/>
+                    </m:oMathParaPr>
+                    <m:oMath xmlns:m="http://schemas.openxmlformats.org/officeDocument/2006/math">
                       <m:sSub>
                         <m:sSubPr>
                           <m:ctrlPr>
@@ -12912,7 +12918,7 @@
             </p:txBody>
           </p:sp>
         </mc:Choice>
-        <mc:Fallback>
+        <mc:Fallback xmlns="">
           <p:sp>
             <p:nvSpPr>
               <p:cNvPr id="3" name="Espaço Reservado para Conteúdo 2">
@@ -13400,12 +13406,15 @@
                 </a:pPr>
                 <a14:m>
                   <m:oMathPara xmlns:m="http://schemas.openxmlformats.org/officeDocument/2006/math">
-                    <m:oMath>
+                    <m:oMathParaPr>
+                      <m:jc m:val="centerGroup"/>
+                    </m:oMathParaPr>
+                    <m:oMath xmlns:m="http://schemas.openxmlformats.org/officeDocument/2006/math">
                       <m:r>
                         <a:rPr lang="pt-BR" i="1">
                           <a:latin typeface="Cambria Math" panose="02040503050406030204" pitchFamily="18" charset="0"/>
                         </a:rPr>
-                        <m:t>ℎ</m:t>
+                        <m:t>h</m:t>
                       </m:r>
                       <m:d>
                         <m:dPr>
@@ -14625,8 +14634,8 @@
           </a:p>
         </p:txBody>
       </p:sp>
-      <mc:AlternateContent xmlns:mc="http://schemas.openxmlformats.org/markup-compatibility/2006">
-        <mc:Choice xmlns:a14="http://schemas.microsoft.com/office/drawing/2010/main" Requires="a14">
+      <mc:AlternateContent xmlns:mc="http://schemas.openxmlformats.org/markup-compatibility/2006" xmlns:a14="http://schemas.microsoft.com/office/drawing/2010/main">
+        <mc:Choice Requires="a14">
           <p:sp>
             <p:nvSpPr>
               <p:cNvPr id="3" name="Espaço Reservado para Conteúdo 2">
@@ -14736,12 +14745,15 @@
                 </a:pPr>
                 <a14:m>
                   <m:oMathPara xmlns:m="http://schemas.openxmlformats.org/officeDocument/2006/math">
-                    <m:oMath>
+                    <m:oMathParaPr>
+                      <m:jc m:val="centerGroup"/>
+                    </m:oMathParaPr>
+                    <m:oMath xmlns:m="http://schemas.openxmlformats.org/officeDocument/2006/math">
                       <m:r>
                         <a:rPr lang="pt-BR" i="1" smtClean="0">
                           <a:latin typeface="Cambria Math" panose="02040503050406030204" pitchFamily="18" charset="0"/>
                         </a:rPr>
-                        <m:t>ℎ</m:t>
+                        <m:t>h</m:t>
                       </m:r>
                       <m:d>
                         <m:dPr>
@@ -15137,7 +15149,10 @@
                 </a:pPr>
                 <a14:m>
                   <m:oMathPara xmlns:m="http://schemas.openxmlformats.org/officeDocument/2006/math">
-                    <m:oMath>
+                    <m:oMathParaPr>
+                      <m:jc m:val="centerGroup"/>
+                    </m:oMathParaPr>
+                    <m:oMath xmlns:m="http://schemas.openxmlformats.org/officeDocument/2006/math">
                       <m:r>
                         <a:rPr lang="pt-BR" b="1" i="1" smtClean="0">
                           <a:latin typeface="Cambria Math" panose="02040503050406030204" pitchFamily="18" charset="0"/>
@@ -15807,7 +15822,7 @@
             </p:txBody>
           </p:sp>
         </mc:Choice>
-        <mc:Fallback>
+        <mc:Fallback xmlns="">
           <p:sp>
             <p:nvSpPr>
               <p:cNvPr id="3" name="Espaço Reservado para Conteúdo 2">
@@ -15942,8 +15957,8 @@
         </p:nvSpPr>
         <p:spPr>
           <a:xfrm>
-            <a:off x="327060" y="2749162"/>
-            <a:ext cx="11537879" cy="1359675"/>
+            <a:off x="327060" y="2658632"/>
+            <a:ext cx="11537879" cy="1540736"/>
           </a:xfrm>
         </p:spPr>
         <p:txBody>
@@ -15956,11 +15971,11 @@
               <a:buNone/>
             </a:pPr>
             <a:r>
-              <a:rPr lang="pt-BR" sz="4000" dirty="0"/>
+              <a:rPr lang="pt-BR" sz="4400" dirty="0"/>
               <a:t>Porém, o desafio agora é </a:t>
             </a:r>
             <a:r>
-              <a:rPr lang="pt-BR" sz="4000" b="1" i="1" dirty="0">
+              <a:rPr lang="pt-BR" sz="4400" b="1" i="1" dirty="0">
                 <a:solidFill>
                   <a:srgbClr val="0070C0"/>
                 </a:solidFill>
@@ -15968,17 +15983,17 @@
               <a:t>encontrar o grau do polinômio</a:t>
             </a:r>
             <a:r>
-              <a:rPr lang="pt-BR" sz="4000" b="1" i="1" dirty="0"/>
+              <a:rPr lang="pt-BR" sz="4400" b="1" i="1" dirty="0"/>
               <a:t> </a:t>
             </a:r>
             <a:r>
-              <a:rPr lang="pt-BR" sz="4000" dirty="0"/>
+              <a:rPr lang="pt-BR" sz="4400" dirty="0"/>
               <a:t>que melhor se aproxime os dados.</a:t>
             </a:r>
           </a:p>
           <a:p>
             <a:pPr algn="ctr"/>
-            <a:endParaRPr lang="pt-BR" sz="4000" dirty="0"/>
+            <a:endParaRPr lang="pt-BR" sz="4400" dirty="0"/>
           </a:p>
         </p:txBody>
       </p:sp>
@@ -16205,8 +16220,8 @@
           </a:p>
         </p:txBody>
       </p:sp>
-      <mc:AlternateContent xmlns:mc="http://schemas.openxmlformats.org/markup-compatibility/2006">
-        <mc:Choice xmlns:a14="http://schemas.microsoft.com/office/drawing/2010/main" Requires="a14">
+      <mc:AlternateContent xmlns:mc="http://schemas.openxmlformats.org/markup-compatibility/2006" xmlns:a14="http://schemas.microsoft.com/office/drawing/2010/main">
+        <mc:Choice Requires="a14">
           <p:sp>
             <p:nvSpPr>
               <p:cNvPr id="3" name="Content Placeholder 2"/>
@@ -16778,7 +16793,7 @@
                     <m:d>
                       <m:dPr>
                         <m:ctrlPr>
-                          <a:rPr lang="pt-BR">
+                          <a:rPr lang="pt-BR" i="1">
                             <a:latin typeface="Cambria Math" panose="02040503050406030204" pitchFamily="18" charset="0"/>
                             <a:ea typeface="Cambria Math" panose="02040503050406030204" pitchFamily="18" charset="0"/>
                           </a:rPr>
@@ -16808,7 +16823,7 @@
             </p:txBody>
           </p:sp>
         </mc:Choice>
-        <mc:Fallback>
+        <mc:Fallback xmlns="">
           <p:sp>
             <p:nvSpPr>
               <p:cNvPr id="3" name="Content Placeholder 2"/>
@@ -17079,18 +17094,18 @@
                   <a:srgbClr val="00B050"/>
                 </a:solidFill>
               </a:rPr>
-              <a:t>função hipótese polinomial</a:t>
-            </a:r>
-            <a:r>
-              <a:rPr lang="pt-BR" dirty="0">
+              <a:t>função </a:t>
+            </a:r>
+            <a:r>
+              <a:rPr lang="pt-BR" b="1" i="1">
                 <a:solidFill>
                   <a:srgbClr val="00B050"/>
                 </a:solidFill>
               </a:rPr>
-              <a:t> </a:t>
-            </a:r>
-            <a:r>
-              <a:rPr lang="pt-BR" dirty="0"/>
+              <a:t>hipótese polinomial </a:t>
+            </a:r>
+            <a:r>
+              <a:rPr lang="pt-BR"/>
               <a:t>para </a:t>
             </a:r>
             <a:r>
@@ -19122,7 +19137,7 @@
                     <m:oMathParaPr>
                       <m:jc m:val="center"/>
                     </m:oMathParaPr>
-                    <m:oMath>
+                    <m:oMath xmlns:m="http://schemas.openxmlformats.org/officeDocument/2006/math">
                       <m:sSub>
                         <m:sSubPr>
                           <m:ctrlPr>
@@ -19314,8 +19329,6 @@
                                       <m:groupChr>
                                         <m:groupChrPr>
                                           <m:chr m:val="⏟"/>
-                                          <m:pos m:val="bot"/>
-                                          <m:vertJc m:val="top"/>
                                           <m:ctrlPr>
                                             <a:rPr lang="pt-BR" sz="2400" i="1">
                                               <a:latin typeface="Cambria Math" panose="02040503050406030204" pitchFamily="18" charset="0"/>
@@ -19905,7 +19918,10 @@
                 <a:pPr/>
                 <a14:m>
                   <m:oMathPara xmlns:m="http://schemas.openxmlformats.org/officeDocument/2006/math">
-                    <m:oMath>
+                    <m:oMathParaPr>
+                      <m:jc m:val="centerGroup"/>
+                    </m:oMathParaPr>
+                    <m:oMath xmlns:m="http://schemas.openxmlformats.org/officeDocument/2006/math">
                       <m:sSub>
                         <m:sSubPr>
                           <m:ctrlPr>
@@ -20786,7 +20802,10 @@
                 </a:pPr>
                 <a14:m>
                   <m:oMathPara xmlns:m="http://schemas.openxmlformats.org/officeDocument/2006/math">
-                    <m:oMath>
+                    <m:oMathParaPr>
+                      <m:jc m:val="centerGroup"/>
+                    </m:oMathParaPr>
+                    <m:oMath xmlns:m="http://schemas.openxmlformats.org/officeDocument/2006/math">
                       <m:acc>
                         <m:accPr>
                           <m:chr m:val="̂"/>
@@ -20955,7 +20974,10 @@
                 </a:pPr>
                 <a14:m>
                   <m:oMathPara xmlns:m="http://schemas.openxmlformats.org/officeDocument/2006/math">
-                    <m:oMath>
+                    <m:oMathParaPr>
+                      <m:jc m:val="centerGroup"/>
+                    </m:oMathParaPr>
+                    <m:oMath xmlns:m="http://schemas.openxmlformats.org/officeDocument/2006/math">
                       <m:sSub>
                         <m:sSubPr>
                           <m:ctrlPr>
@@ -21475,7 +21497,10 @@
                 </a:pPr>
                 <a14:m>
                   <m:oMathPara xmlns:m="http://schemas.openxmlformats.org/officeDocument/2006/math">
-                    <m:oMath>
+                    <m:oMathParaPr>
+                      <m:jc m:val="centerGroup"/>
+                    </m:oMathParaPr>
+                    <m:oMath xmlns:m="http://schemas.openxmlformats.org/officeDocument/2006/math">
                       <m:sSub>
                         <m:sSubPr>
                           <m:ctrlPr>
@@ -21747,7 +21772,10 @@
                 </a:pPr>
                 <a14:m>
                   <m:oMathPara xmlns:m="http://schemas.openxmlformats.org/officeDocument/2006/math">
-                    <m:oMath>
+                    <m:oMathParaPr>
+                      <m:jc m:val="centerGroup"/>
+                    </m:oMathParaPr>
+                    <m:oMath xmlns:m="http://schemas.openxmlformats.org/officeDocument/2006/math">
                       <m:acc>
                         <m:accPr>
                           <m:chr m:val="̂"/>
@@ -22557,7 +22585,10 @@
                 </a:pPr>
                 <a14:m>
                   <m:oMathPara xmlns:m="http://schemas.openxmlformats.org/officeDocument/2006/math">
-                    <m:oMath>
+                    <m:oMathParaPr>
+                      <m:jc m:val="centerGroup"/>
+                    </m:oMathParaPr>
+                    <m:oMath xmlns:m="http://schemas.openxmlformats.org/officeDocument/2006/math">
                       <m:acc>
                         <m:accPr>
                           <m:chr m:val="̂"/>
@@ -24274,7 +24305,10 @@
                   <a:pPr/>
                   <a14:m>
                     <m:oMathPara xmlns:m="http://schemas.openxmlformats.org/officeDocument/2006/math">
-                      <m:oMath>
+                      <m:oMathParaPr>
+                        <m:jc m:val="centerGroup"/>
+                      </m:oMathParaPr>
+                      <m:oMath xmlns:m="http://schemas.openxmlformats.org/officeDocument/2006/math">
                         <m:sSub>
                           <m:sSubPr>
                             <m:ctrlPr>
@@ -24374,7 +24408,10 @@
                   <a:pPr/>
                   <a14:m>
                     <m:oMathPara xmlns:m="http://schemas.openxmlformats.org/officeDocument/2006/math">
-                      <m:oMath>
+                      <m:oMathParaPr>
+                        <m:jc m:val="centerGroup"/>
+                      </m:oMathParaPr>
+                      <m:oMath xmlns:m="http://schemas.openxmlformats.org/officeDocument/2006/math">
                         <m:sSub>
                           <m:sSubPr>
                             <m:ctrlPr>
@@ -24957,7 +24994,10 @@
                   <a:pPr/>
                   <a14:m>
                     <m:oMathPara xmlns:m="http://schemas.openxmlformats.org/officeDocument/2006/math">
-                      <m:oMath>
+                      <m:oMathParaPr>
+                        <m:jc m:val="centerGroup"/>
+                      </m:oMathParaPr>
+                      <m:oMath xmlns:m="http://schemas.openxmlformats.org/officeDocument/2006/math">
                         <m:sSub>
                           <m:sSubPr>
                             <m:ctrlPr>
@@ -25057,7 +25097,10 @@
                   <a:pPr/>
                   <a14:m>
                     <m:oMathPara xmlns:m="http://schemas.openxmlformats.org/officeDocument/2006/math">
-                      <m:oMath>
+                      <m:oMathParaPr>
+                        <m:jc m:val="centerGroup"/>
+                      </m:oMathParaPr>
+                      <m:oMath xmlns:m="http://schemas.openxmlformats.org/officeDocument/2006/math">
                         <m:sSub>
                           <m:sSubPr>
                             <m:ctrlPr>
@@ -27570,7 +27613,10 @@
                 </a:pPr>
                 <a14:m>
                   <m:oMathPara xmlns:m="http://schemas.openxmlformats.org/officeDocument/2006/math">
-                    <m:oMath>
+                    <m:oMathParaPr>
+                      <m:jc m:val="centerGroup"/>
+                    </m:oMathParaPr>
+                    <m:oMath xmlns:m="http://schemas.openxmlformats.org/officeDocument/2006/math">
                       <m:sSub>
                         <m:sSubPr>
                           <m:ctrlPr>
@@ -28190,7 +28236,10 @@
                 </a:pPr>
                 <a14:m>
                   <m:oMathPara xmlns:m="http://schemas.openxmlformats.org/officeDocument/2006/math">
-                    <m:oMath>
+                    <m:oMathParaPr>
+                      <m:jc m:val="centerGroup"/>
+                    </m:oMathParaPr>
+                    <m:oMath xmlns:m="http://schemas.openxmlformats.org/officeDocument/2006/math">
                       <m:sSub>
                         <m:sSubPr>
                           <m:ctrlPr>
@@ -28382,8 +28431,6 @@
                                       <m:groupChr>
                                         <m:groupChrPr>
                                           <m:chr m:val="⏟"/>
-                                          <m:pos m:val="bot"/>
-                                          <m:vertJc m:val="top"/>
                                           <m:ctrlPr>
                                             <a:rPr lang="pt-BR" i="1">
                                               <a:latin typeface="Cambria Math" panose="02040503050406030204" pitchFamily="18" charset="0"/>
@@ -29034,7 +29081,7 @@
                     <m:oMathParaPr>
                       <m:jc m:val="center"/>
                     </m:oMathParaPr>
-                    <m:oMath>
+                    <m:oMath xmlns:m="http://schemas.openxmlformats.org/officeDocument/2006/math">
                       <m:sSub>
                         <m:sSubPr>
                           <m:ctrlPr>
@@ -30230,15 +30277,6 @@
 </file>
 
 <file path=customXml/item1.xml><?xml version="1.0" encoding="utf-8"?>
-<?mso-contentType ?>
-<FormTemplates xmlns="http://schemas.microsoft.com/sharepoint/v3/contenttype/forms">
-  <Display>DocumentLibraryForm</Display>
-  <Edit>DocumentLibraryForm</Edit>
-  <New>DocumentLibraryForm</New>
-</FormTemplates>
-</file>
-
-<file path=customXml/item2.xml><?xml version="1.0" encoding="utf-8"?>
 <ct:contentTypeSchema xmlns:ct="http://schemas.microsoft.com/office/2006/metadata/contentType" xmlns:ma="http://schemas.microsoft.com/office/2006/metadata/properties/metaAttributes" ct:_="" ma:_="" ma:contentTypeName="Document" ma:contentTypeID="0x010100A6553FE09A98904B92A9D00A38127206" ma:contentTypeVersion="18" ma:contentTypeDescription="Create a new document." ma:contentTypeScope="" ma:versionID="92863cfdd2d5fd2ee9b6f30d8c51b1f5">
   <xsd:schema xmlns:xsd="http://www.w3.org/2001/XMLSchema" xmlns:xs="http://www.w3.org/2001/XMLSchema" xmlns:p="http://schemas.microsoft.com/office/2006/metadata/properties" xmlns:ns3="10322600-47b9-44f6-86ef-c87c87ba6e82" xmlns:ns4="026c264a-64f6-48aa-bde0-8bf9e5064f89" targetNamespace="http://schemas.microsoft.com/office/2006/metadata/properties" ma:root="true" ma:fieldsID="86148dd4b4cd32a5258cd233a95bdcf5" ns3:_="" ns4:_="">
     <xsd:import namespace="10322600-47b9-44f6-86ef-c87c87ba6e82"/>
@@ -30491,6 +30529,15 @@
 </ct:contentTypeSchema>
 </file>
 
+<file path=customXml/item2.xml><?xml version="1.0" encoding="utf-8"?>
+<?mso-contentType ?>
+<FormTemplates xmlns="http://schemas.microsoft.com/sharepoint/v3/contenttype/forms">
+  <Display>DocumentLibraryForm</Display>
+  <Edit>DocumentLibraryForm</Edit>
+  <New>DocumentLibraryForm</New>
+</FormTemplates>
+</file>
+
 <file path=customXml/item3.xml><?xml version="1.0" encoding="utf-8"?>
 <p:properties xmlns:p="http://schemas.microsoft.com/office/2006/metadata/properties" xmlns:xsi="http://www.w3.org/2001/XMLSchema-instance" xmlns:pc="http://schemas.microsoft.com/office/infopath/2007/PartnerControls">
   <documentManagement>
@@ -30500,14 +30547,6 @@
 </file>
 
 <file path=customXml/itemProps1.xml><?xml version="1.0" encoding="utf-8"?>
-<ds:datastoreItem xmlns:ds="http://schemas.openxmlformats.org/officeDocument/2006/customXml" ds:itemID="{D67F36EB-496F-4262-A9FD-0843EF3B6D81}">
-  <ds:schemaRefs>
-    <ds:schemaRef ds:uri="http://schemas.microsoft.com/sharepoint/v3/contenttype/forms"/>
-  </ds:schemaRefs>
-</ds:datastoreItem>
-</file>
-
-<file path=customXml/itemProps2.xml><?xml version="1.0" encoding="utf-8"?>
 <ds:datastoreItem xmlns:ds="http://schemas.openxmlformats.org/officeDocument/2006/customXml" ds:itemID="{43BF8E7A-7F85-4B5C-91EE-1390147153F1}">
   <ds:schemaRefs>
     <ds:schemaRef ds:uri="http://schemas.microsoft.com/office/2006/metadata/contentType"/>
@@ -30526,6 +30565,14 @@
 </ds:datastoreItem>
 </file>
 
+<file path=customXml/itemProps2.xml><?xml version="1.0" encoding="utf-8"?>
+<ds:datastoreItem xmlns:ds="http://schemas.openxmlformats.org/officeDocument/2006/customXml" ds:itemID="{D67F36EB-496F-4262-A9FD-0843EF3B6D81}">
+  <ds:schemaRefs>
+    <ds:schemaRef ds:uri="http://schemas.microsoft.com/sharepoint/v3/contenttype/forms"/>
+  </ds:schemaRefs>
+</ds:datastoreItem>
+</file>
+
 <file path=customXml/itemProps3.xml><?xml version="1.0" encoding="utf-8"?>
 <ds:datastoreItem xmlns:ds="http://schemas.openxmlformats.org/officeDocument/2006/customXml" ds:itemID="{0377E4F8-F73A-4838-818D-26069B242819}">
   <ds:schemaRefs>
